--- a/lecons/F4/47_F4_M2_L37_Food_Loss_and_Food_Waste.pptx
+++ b/lecons/F4/47_F4_M2_L37_Food_Loss_and_Food_Waste.pptx
@@ -13037,7 +13037,7 @@
         <p:spPr>
           <a:xfrm>
             <a:off x="0" y="658368"/>
-            <a:ext cx="2468880" cy="5833872"/>
+            <a:ext cx="5120640" cy="5833872"/>
           </a:xfrm>
           <a:prstGeom prst="rect">
             <a:avLst/>
@@ -13052,8 +13052,8 @@
         </p:nvSpPr>
         <p:spPr>
           <a:xfrm>
-            <a:off x="2697480" y="1005840"/>
-            <a:ext cx="9174175" cy="731520"/>
+            <a:off x="5349240" y="1005840"/>
+            <a:ext cx="6522415" cy="731520"/>
           </a:xfrm>
           <a:prstGeom prst="rect">
             <a:avLst/>
@@ -13093,8 +13093,8 @@
         </p:nvSpPr>
         <p:spPr>
           <a:xfrm>
-            <a:off x="2697480" y="1783080"/>
-            <a:ext cx="9174175" cy="4663440"/>
+            <a:off x="5349240" y="1783080"/>
+            <a:ext cx="6522415" cy="4663440"/>
           </a:xfrm>
           <a:prstGeom prst="rect">
             <a:avLst/>
@@ -13113,7 +13113,7 @@
               <a:buNone/>
             </a:pPr>
             <a:r>
-              <a:rPr lang="en-US" sz="4000" b="1" dirty="0">
+              <a:rPr lang="en-US" sz="3200" b="1" dirty="0">
                 <a:solidFill>
                   <a:srgbClr val="111111"/>
                 </a:solidFill>
@@ -13123,7 +13123,7 @@
               </a:rPr>
               <a:t>Topic: Managing Resources for Development through Economic Activities</a:t>
             </a:r>
-            <a:endParaRPr lang="en-US" sz="4000" dirty="0"/>
+            <a:endParaRPr lang="en-US" sz="3200" dirty="0"/>
           </a:p>
           <a:p>
             <a:pPr algn="l" indent="0" marL="0">
@@ -13133,7 +13133,7 @@
               <a:buNone/>
             </a:pPr>
             <a:r>
-              <a:rPr lang="en-US" sz="4000" b="1" dirty="0">
+              <a:rPr lang="en-US" sz="3200" b="1" dirty="0">
                 <a:solidFill>
                   <a:srgbClr val="111111"/>
                 </a:solidFill>
@@ -13143,7 +13143,7 @@
               </a:rPr>
               <a:t>Sub-topic: The Economic Development Potentials of Cameroon in the Primary Sector: Agriculture</a:t>
             </a:r>
-            <a:endParaRPr lang="en-US" sz="4000" dirty="0"/>
+            <a:endParaRPr lang="en-US" sz="3200" dirty="0"/>
           </a:p>
           <a:p>
             <a:pPr algn="l" indent="0" marL="0">
@@ -13153,7 +13153,7 @@
               <a:buNone/>
             </a:pPr>
             <a:r>
-              <a:rPr lang="en-US" sz="4000" b="1" dirty="0">
+              <a:rPr lang="en-US" sz="3200" b="1" dirty="0">
                 <a:solidFill>
                   <a:srgbClr val="990011"/>
                 </a:solidFill>
@@ -13163,7 +13163,7 @@
               </a:rPr>
               <a:t>Lesson 37: Food Loss and Food Waste</a:t>
             </a:r>
-            <a:endParaRPr lang="en-US" sz="4000" dirty="0"/>
+            <a:endParaRPr lang="en-US" sz="3200" dirty="0"/>
           </a:p>
         </p:txBody>
       </p:sp>

--- a/lecons/F4/47_F4_M2_L37_Food_Loss_and_Food_Waste.pptx
+++ b/lecons/F4/47_F4_M2_L37_Food_Loss_and_Food_Waste.pptx
@@ -57,9 +57,11 @@
     <p:sldId id="305" r:id="rId51"/>
     <p:sldId id="306" r:id="rId52"/>
     <p:sldId id="307" r:id="rId53"/>
+    <p:sldId id="308" r:id="rId54"/>
+    <p:sldId id="309" r:id="rId55"/>
   </p:sldIdLst>
   <p:notesMasterIdLst>
-    <p:notesMasterId r:id="rId54"/>
+    <p:notesMasterId r:id="rId56"/>
   </p:notesMasterIdLst>
   <p:sldSz cx="12192000" cy="6858000"/>
   <p:notesSz cx="6858000" cy="12192000"/>
@@ -3017,7 +3019,7 @@
           <a:p>
             <a:r>
               <a:rPr lang="en-US" dirty="0"/>
-              <a:t>Let us copy Causes. Food loss and waste have the following causes. On this slide we have Causes of loss. Write each point on a new line, with the key term first, and explain it in your own words when we revise. When you finish, we go to the next slide.</a:t>
+              <a:t>Let us copy Causes of Food Loss. Food is lost for the following reasons. On this slide we have Poor storage, Pests and Bad roads. Write each point on a new line, with the key term first, and explain it in your own words when we revise. When you finish, we go to the next slide.</a:t>
             </a:r>
             <a:endParaRPr lang="en-US" dirty="0"/>
           </a:p>
@@ -3105,7 +3107,7 @@
           <a:p>
             <a:r>
               <a:rPr lang="en-US" dirty="0"/>
-              <a:t>We continue with Causes. On this slide we have Causes of waste. Write each point on a new line, with the key term first, and explain it in your own words when we revise.</a:t>
+              <a:t>We continue with Causes of Food Loss. On this slide we have Lack of processing. Write each point on a new line, with the key term first, and explain it in your own words when we revise.</a:t>
             </a:r>
             <a:endParaRPr lang="en-US" dirty="0"/>
           </a:p>
@@ -3193,7 +3195,7 @@
           <a:p>
             <a:r>
               <a:rPr lang="en-US" dirty="0"/>
-              <a:t>Let us copy Consequences. Food loss and waste have the following consequences. On this slide we have Social consequences and Economic and environmental consequences. Write each point on a new line, with the key term first, and explain it in your own words when we revise.</a:t>
+              <a:t>Let us copy Causes of Food Waste. Food is wasted for the following reasons. On this slide we have Buying too much and Poor planning. Write each point on a new line, with the key term first, and explain it in your own words when we revise. When you finish, we go to the next slide.</a:t>
             </a:r>
             <a:endParaRPr lang="en-US" dirty="0"/>
           </a:p>
@@ -3281,7 +3283,7 @@
           <a:p>
             <a:r>
               <a:rPr lang="en-US" dirty="0"/>
-              <a:t>Let us copy Solutions. Food loss and waste can be reduced as follows. On this slide we have Better storage and processing and Good roads and markets. Write each point on a new line, with the key term first, and explain it in your own words when we revise. When you finish, we go to the next slide.</a:t>
+              <a:t>We continue with Causes of Food Waste. On this slide we have Throwing away leftovers. Write each point on a new line, with the key term first, and explain it in your own words when we revise.</a:t>
             </a:r>
             <a:endParaRPr lang="en-US" dirty="0"/>
           </a:p>
@@ -3369,7 +3371,7 @@
           <a:p>
             <a:r>
               <a:rPr lang="en-US" dirty="0"/>
-              <a:t>We continue with Solutions. On this slide we have Good habits. Write each point on a new line, with the key term first, and explain it in your own words when we revise.</a:t>
+              <a:t>Let us copy Consequences. Food loss and waste have the following consequences. On this slide we have Social consequences and Economic and environmental consequences. Write each point on a new line, with the key term first, and explain it in your own words when we revise.</a:t>
             </a:r>
             <a:endParaRPr lang="en-US" dirty="0"/>
           </a:p>
@@ -3545,7 +3547,7 @@
           <a:p>
             <a:r>
               <a:rPr lang="en-US" dirty="0"/>
-              <a:t>Now draw this illustration in your notebook: food solutions. Give it a title and label it clearly.</a:t>
+              <a:t>Let us copy Solutions. Food loss and waste can be reduced as follows. On this slide we have Better storage and processing and Good roads and markets. Write each point on a new line, with the key term first, and explain it in your own words when we revise. When you finish, we go to the next slide.</a:t>
             </a:r>
             <a:endParaRPr lang="en-US" dirty="0"/>
           </a:p>
@@ -3633,7 +3635,7 @@
           <a:p>
             <a:r>
               <a:rPr lang="en-US" dirty="0"/>
-              <a:t>Now let us check what you have understood. Question 1: Distinguish food loss and food waste. Answer in your exercise book.</a:t>
+              <a:t>We continue with Solutions. On this slide we have Good habits. Write each point on a new line, with the key term first, and explain it in your own words when we revise.</a:t>
             </a:r>
             <a:endParaRPr lang="en-US" dirty="0"/>
           </a:p>
@@ -3721,7 +3723,7 @@
           <a:p>
             <a:r>
               <a:rPr lang="en-US" dirty="0"/>
-              <a:t>The expected answer is: loss: during production and transport. Waste: in shops and homes. If you got it right, well done.</a:t>
+              <a:t>Now draw this illustration in your notebook: food solutions. Give it a title and label it clearly.</a:t>
             </a:r>
             <a:endParaRPr lang="en-US" dirty="0"/>
           </a:p>
@@ -3809,7 +3811,7 @@
           <a:p>
             <a:r>
               <a:rPr lang="en-US" dirty="0"/>
-              <a:t>Now let us check what you have understood. Question 2: Give two solutions. Answer in your exercise book.</a:t>
+              <a:t>Now let us check what you have understood. Question 1: Distinguish food loss and food waste. Answer in your exercise book.</a:t>
             </a:r>
             <a:endParaRPr lang="en-US" dirty="0"/>
           </a:p>
@@ -3897,7 +3899,7 @@
           <a:p>
             <a:r>
               <a:rPr lang="en-US" dirty="0"/>
-              <a:t>The expected answer is: better storage and buying only what we need. If you got it right, well done.</a:t>
+              <a:t>The expected answer is: loss: during production and transport. Waste: in shops and homes. If you got it right, well done.</a:t>
             </a:r>
             <a:endParaRPr lang="en-US" dirty="0"/>
           </a:p>
@@ -3985,7 +3987,7 @@
           <a:p>
             <a:r>
               <a:rPr lang="en-US" dirty="0"/>
-              <a:t>For those who need more practice, fill in the blanks in your exercise book. The answers are: number 1, loss; number 2, waste; number 3, processing.</a:t>
+              <a:t>Now let us check what you have understood. Question 2: Give two solutions. Answer in your exercise book.</a:t>
             </a:r>
             <a:endParaRPr lang="en-US" dirty="0"/>
           </a:p>
@@ -4073,7 +4075,7 @@
           <a:p>
             <a:r>
               <a:rPr lang="en-US" dirty="0"/>
-              <a:t>For your homework: Observe food waste at home for three days and suggest how to reduce it. We shall correct it at the beginning of our next lesson.</a:t>
+              <a:t>The expected answer is: better storage and buying only what we need. If you got it right, well done.</a:t>
             </a:r>
             <a:endParaRPr lang="en-US" dirty="0"/>
           </a:p>
@@ -4161,7 +4163,7 @@
           <a:p>
             <a:r>
               <a:rPr lang="en-US" dirty="0"/>
-              <a:t>Our next lesson will be on Lesson 38: Problems of Tropical Agriculture with Reference to Cameroon. Thank you for your attention, and see you next time.</a:t>
+              <a:t>For those who need more practice, fill in the blanks in your exercise book. The answers are: number 1, loss; number 2, waste; number 3, processing.</a:t>
             </a:r>
             <a:endParaRPr lang="en-US" dirty="0"/>
           </a:p>
@@ -4249,7 +4251,7 @@
           <a:p>
             <a:r>
               <a:rPr lang="en-US" dirty="0"/>
-              <a:t>Let us play the bilingual game. I say a word in English, and you give me the French word. Then we do the reverse.</a:t>
+              <a:t>For your homework: Observe food waste at home for three days and suggest how to reduce it. We shall correct it at the beginning of our next lesson.</a:t>
             </a:r>
             <a:endParaRPr lang="en-US" dirty="0"/>
           </a:p>
@@ -4337,7 +4339,7 @@
           <a:p>
             <a:r>
               <a:rPr lang="en-US" dirty="0"/>
-              <a:t>I record this information in the official logbook of the class after the lesson.</a:t>
+              <a:t>Our next lesson will be on Lesson 38: Problems of Tropical Agriculture with Reference to Cameroon. Thank you for your attention, and see you next time.</a:t>
             </a:r>
             <a:endParaRPr lang="en-US" dirty="0"/>
           </a:p>
@@ -4513,7 +4515,7 @@
           <a:p>
             <a:r>
               <a:rPr lang="en-US" dirty="0"/>
-              <a:t>I complete the second page of the logbook: the matter taught, the evaluation, the homework and the attendance.</a:t>
+              <a:t>Let us play the bilingual game. I say a word in English, and you give me the French word. Then we do the reverse.</a:t>
             </a:r>
             <a:endParaRPr lang="en-US" dirty="0"/>
           </a:p>
@@ -4601,7 +4603,7 @@
           <a:p>
             <a:r>
               <a:rPr lang="en-US" dirty="0"/>
-              <a:t>This slide is for me, the teacher: it gives the timing of the lesson and what to do if the projector is not available.</a:t>
+              <a:t>I record this information in the official logbook of the class after the lesson.</a:t>
             </a:r>
             <a:endParaRPr lang="en-US" dirty="0"/>
           </a:p>
@@ -4689,7 +4691,7 @@
           <a:p>
             <a:r>
               <a:rPr lang="en-US" dirty="0"/>
-              <a:t>These are the references and picture credits used to prepare this lesson.</a:t>
+              <a:t>I complete the second page of the logbook: the matter taught, the evaluation, the homework and the attendance.</a:t>
             </a:r>
             <a:endParaRPr lang="en-US" dirty="0"/>
           </a:p>
@@ -4713,6 +4715,182 @@
             <a:fld id="{F7021451-1387-4CA6-816F-3879F97B5CBC}" type="slidenum">
               <a:rPr lang="en-US"/>
               <a:t>52</a:t>
+            </a:fld>
+            <a:endParaRPr lang="en-US"/>
+          </a:p>
+        </p:txBody>
+      </p:sp>
+    </p:spTree>
+    <p:extLst>
+      <p:ext uri="{BB962C8B-B14F-4D97-AF65-F5344CB8AC3E}">
+        <p14:creationId xmlns:p14="http://schemas.microsoft.com/office/powerpoint/2010/main" val="1024086991"/>
+      </p:ext>
+    </p:extLst>
+  </p:cSld>
+  <p:clrMapOvr>
+    <a:masterClrMapping/>
+  </p:clrMapOvr>
+</p:notes>
+</file>
+
+<file path=ppt/notesSlides/notesSlide53.xml><?xml version="1.0" encoding="utf-8"?>
+<p:notes xmlns:a="http://schemas.openxmlformats.org/drawingml/2006/main" xmlns:r="http://schemas.openxmlformats.org/officeDocument/2006/relationships" xmlns:p="http://schemas.openxmlformats.org/presentationml/2006/main">
+  <p:cSld>
+    <p:spTree>
+      <p:nvGrpSpPr>
+        <p:cNvPr id="1" name=""/>
+        <p:cNvGrpSpPr/>
+        <p:nvPr/>
+      </p:nvGrpSpPr>
+      <p:grpSpPr>
+        <a:xfrm>
+          <a:off x="0" y="0"/>
+          <a:ext cx="0" cy="0"/>
+          <a:chOff x="0" y="0"/>
+          <a:chExt cx="0" cy="0"/>
+        </a:xfrm>
+      </p:grpSpPr>
+      <p:sp>
+        <p:nvSpPr>
+          <p:cNvPr id="2" name="Slide Image Placeholder 1"/>
+          <p:cNvSpPr>
+            <a:spLocks noGrp="1" noRot="1" noChangeAspect="1"/>
+          </p:cNvSpPr>
+          <p:nvPr>
+            <p:ph type="sldImg"/>
+          </p:nvPr>
+        </p:nvSpPr>
+        <p:spPr/>
+      </p:sp>
+      <p:sp>
+        <p:nvSpPr>
+          <p:cNvPr id="3" name="Notes Placeholder 2"/>
+          <p:cNvSpPr>
+            <a:spLocks noGrp="1"/>
+          </p:cNvSpPr>
+          <p:nvPr>
+            <p:ph type="body" idx="1"/>
+          </p:nvPr>
+        </p:nvSpPr>
+        <p:spPr/>
+        <p:txBody>
+          <a:bodyPr/>
+          <a:lstStyle/>
+          <a:p>
+            <a:r>
+              <a:rPr lang="en-US" dirty="0"/>
+              <a:t>This slide is for me, the teacher: it gives the timing of the lesson and what to do if the projector is not available.</a:t>
+            </a:r>
+            <a:endParaRPr lang="en-US" dirty="0"/>
+          </a:p>
+        </p:txBody>
+      </p:sp>
+      <p:sp>
+        <p:nvSpPr>
+          <p:cNvPr id="4" name="Slide Number Placeholder 3"/>
+          <p:cNvSpPr>
+            <a:spLocks noGrp="1"/>
+          </p:cNvSpPr>
+          <p:nvPr>
+            <p:ph type="sldNum" sz="quarter" idx="10"/>
+          </p:nvPr>
+        </p:nvSpPr>
+        <p:spPr/>
+        <p:txBody>
+          <a:bodyPr/>
+          <a:lstStyle/>
+          <a:p>
+            <a:fld id="{F7021451-1387-4CA6-816F-3879F97B5CBC}" type="slidenum">
+              <a:rPr lang="en-US"/>
+              <a:t>53</a:t>
+            </a:fld>
+            <a:endParaRPr lang="en-US"/>
+          </a:p>
+        </p:txBody>
+      </p:sp>
+    </p:spTree>
+    <p:extLst>
+      <p:ext uri="{BB962C8B-B14F-4D97-AF65-F5344CB8AC3E}">
+        <p14:creationId xmlns:p14="http://schemas.microsoft.com/office/powerpoint/2010/main" val="1024086991"/>
+      </p:ext>
+    </p:extLst>
+  </p:cSld>
+  <p:clrMapOvr>
+    <a:masterClrMapping/>
+  </p:clrMapOvr>
+</p:notes>
+</file>
+
+<file path=ppt/notesSlides/notesSlide54.xml><?xml version="1.0" encoding="utf-8"?>
+<p:notes xmlns:a="http://schemas.openxmlformats.org/drawingml/2006/main" xmlns:r="http://schemas.openxmlformats.org/officeDocument/2006/relationships" xmlns:p="http://schemas.openxmlformats.org/presentationml/2006/main">
+  <p:cSld>
+    <p:spTree>
+      <p:nvGrpSpPr>
+        <p:cNvPr id="1" name=""/>
+        <p:cNvGrpSpPr/>
+        <p:nvPr/>
+      </p:nvGrpSpPr>
+      <p:grpSpPr>
+        <a:xfrm>
+          <a:off x="0" y="0"/>
+          <a:ext cx="0" cy="0"/>
+          <a:chOff x="0" y="0"/>
+          <a:chExt cx="0" cy="0"/>
+        </a:xfrm>
+      </p:grpSpPr>
+      <p:sp>
+        <p:nvSpPr>
+          <p:cNvPr id="2" name="Slide Image Placeholder 1"/>
+          <p:cNvSpPr>
+            <a:spLocks noGrp="1" noRot="1" noChangeAspect="1"/>
+          </p:cNvSpPr>
+          <p:nvPr>
+            <p:ph type="sldImg"/>
+          </p:nvPr>
+        </p:nvSpPr>
+        <p:spPr/>
+      </p:sp>
+      <p:sp>
+        <p:nvSpPr>
+          <p:cNvPr id="3" name="Notes Placeholder 2"/>
+          <p:cNvSpPr>
+            <a:spLocks noGrp="1"/>
+          </p:cNvSpPr>
+          <p:nvPr>
+            <p:ph type="body" idx="1"/>
+          </p:nvPr>
+        </p:nvSpPr>
+        <p:spPr/>
+        <p:txBody>
+          <a:bodyPr/>
+          <a:lstStyle/>
+          <a:p>
+            <a:r>
+              <a:rPr lang="en-US" dirty="0"/>
+              <a:t>These are the references and picture credits used to prepare this lesson.</a:t>
+            </a:r>
+            <a:endParaRPr lang="en-US" dirty="0"/>
+          </a:p>
+        </p:txBody>
+      </p:sp>
+      <p:sp>
+        <p:nvSpPr>
+          <p:cNvPr id="4" name="Slide Number Placeholder 3"/>
+          <p:cNvSpPr>
+            <a:spLocks noGrp="1"/>
+          </p:cNvSpPr>
+          <p:nvPr>
+            <p:ph type="sldNum" sz="quarter" idx="10"/>
+          </p:nvPr>
+        </p:nvSpPr>
+        <p:spPr/>
+        <p:txBody>
+          <a:bodyPr/>
+          <a:lstStyle/>
+          <a:p>
+            <a:fld id="{F7021451-1387-4CA6-816F-3879F97B5CBC}" type="slidenum">
+              <a:rPr lang="en-US"/>
+              <a:t>54</a:t>
             </a:fld>
             <a:endParaRPr lang="en-US"/>
           </a:p>
@@ -13589,7 +13767,7 @@
         <p:spPr>
           <a:xfrm>
             <a:off x="0" y="658368"/>
-            <a:ext cx="5120640" cy="5833872"/>
+            <a:ext cx="2468880" cy="5833872"/>
           </a:xfrm>
           <a:prstGeom prst="rect">
             <a:avLst/>
@@ -13604,8 +13782,8 @@
         </p:nvSpPr>
         <p:spPr>
           <a:xfrm>
-            <a:off x="5349240" y="1005840"/>
-            <a:ext cx="6522415" cy="731520"/>
+            <a:off x="2697480" y="1005840"/>
+            <a:ext cx="9174175" cy="731520"/>
           </a:xfrm>
           <a:prstGeom prst="rect">
             <a:avLst/>
@@ -13645,8 +13823,47 @@
         </p:nvSpPr>
         <p:spPr>
           <a:xfrm>
-            <a:off x="5349240" y="1783080"/>
-            <a:ext cx="6522415" cy="4663440"/>
+            <a:off x="2697480" y="1737360"/>
+            <a:ext cx="9174175" cy="457200"/>
+          </a:xfrm>
+          <a:prstGeom prst="rect">
+            <a:avLst/>
+          </a:prstGeom>
+          <a:noFill/>
+          <a:ln/>
+        </p:spPr>
+        <p:txBody>
+          <a:bodyPr wrap="square" lIns="0" tIns="0" rIns="0" bIns="0" rtlCol="0" anchor="ctr"/>
+          <a:lstStyle/>
+          <a:p>
+            <a:pPr algn="l" indent="0" marL="0">
+              <a:buNone/>
+            </a:pPr>
+            <a:r>
+              <a:rPr lang="en-US" sz="3200" b="1" dirty="0">
+                <a:solidFill>
+                  <a:srgbClr val="990011"/>
+                </a:solidFill>
+                <a:latin typeface="Times New Roman" pitchFamily="34" charset="0"/>
+                <a:ea typeface="Times New Roman" pitchFamily="34" charset="-122"/>
+                <a:cs typeface="Times New Roman" pitchFamily="34" charset="-120"/>
+              </a:rPr>
+              <a:t>A) Causes of Food Loss</a:t>
+            </a:r>
+            <a:endParaRPr lang="en-US" sz="3200" dirty="0"/>
+          </a:p>
+        </p:txBody>
+      </p:sp>
+      <p:sp>
+        <p:nvSpPr>
+          <p:cNvPr id="6" name="Text 3"/>
+          <p:cNvSpPr/>
+          <p:nvPr/>
+        </p:nvSpPr>
+        <p:spPr>
+          <a:xfrm>
+            <a:off x="2697480" y="2240280"/>
+            <a:ext cx="9174175" cy="4206240"/>
           </a:xfrm>
           <a:prstGeom prst="rect">
             <a:avLst/>
@@ -13673,7 +13890,7 @@
                 <a:ea typeface="Times New Roman" pitchFamily="34" charset="-122"/>
                 <a:cs typeface="Times New Roman" pitchFamily="34" charset="-120"/>
               </a:rPr>
-              <a:t>Food loss and waste have the following causes:</a:t>
+              <a:t>Food is lost for the following reasons:</a:t>
             </a:r>
             <a:endParaRPr lang="en-US" sz="4000" dirty="0"/>
           </a:p>
@@ -13693,7 +13910,7 @@
                 <a:ea typeface="Times New Roman" pitchFamily="34" charset="-122"/>
                 <a:cs typeface="Times New Roman" pitchFamily="34" charset="-120"/>
               </a:rPr>
-              <a:t>Causes of loss: </a:t>
+              <a:t>Poor storage: </a:t>
             </a:r>
             <a:pPr algn="l" indent="0" marL="0">
               <a:spcAft>
@@ -13710,7 +13927,81 @@
                 <a:ea typeface="Times New Roman" pitchFamily="34" charset="-122"/>
                 <a:cs typeface="Times New Roman" pitchFamily="34" charset="-120"/>
               </a:rPr>
-              <a:t>Poor storage, pests, bad roads and lack of processing cause food loss.</a:t>
+              <a:t>Grain rots or is eaten by insects in bad stores.</a:t>
+            </a:r>
+            <a:endParaRPr lang="en-US" sz="4000" dirty="0"/>
+          </a:p>
+          <a:p>
+            <a:pPr algn="l" indent="0" marL="0">
+              <a:spcAft>
+                <a:spcPts val="800"/>
+              </a:spcAft>
+              <a:buNone/>
+            </a:pPr>
+            <a:r>
+              <a:rPr lang="en-US" sz="4000" b="1" dirty="0">
+                <a:solidFill>
+                  <a:srgbClr val="111111"/>
+                </a:solidFill>
+                <a:latin typeface="Times New Roman" pitchFamily="34" charset="0"/>
+                <a:ea typeface="Times New Roman" pitchFamily="34" charset="-122"/>
+                <a:cs typeface="Times New Roman" pitchFamily="34" charset="-120"/>
+              </a:rPr>
+              <a:t>Pests: </a:t>
+            </a:r>
+            <a:pPr algn="l" indent="0" marL="0">
+              <a:spcAft>
+                <a:spcPts val="800"/>
+              </a:spcAft>
+              <a:buNone/>
+            </a:pPr>
+            <a:r>
+              <a:rPr lang="en-US" sz="4000" dirty="0">
+                <a:solidFill>
+                  <a:srgbClr val="111111"/>
+                </a:solidFill>
+                <a:latin typeface="Times New Roman" pitchFamily="34" charset="0"/>
+                <a:ea typeface="Times New Roman" pitchFamily="34" charset="-122"/>
+                <a:cs typeface="Times New Roman" pitchFamily="34" charset="-120"/>
+              </a:rPr>
+              <a:t>Rats and insects destroy food.</a:t>
+            </a:r>
+            <a:endParaRPr lang="en-US" sz="4000" dirty="0"/>
+          </a:p>
+          <a:p>
+            <a:pPr algn="l" indent="0" marL="0">
+              <a:spcAft>
+                <a:spcPts val="800"/>
+              </a:spcAft>
+              <a:buNone/>
+            </a:pPr>
+            <a:r>
+              <a:rPr lang="en-US" sz="4000" b="1" dirty="0">
+                <a:solidFill>
+                  <a:srgbClr val="111111"/>
+                </a:solidFill>
+                <a:latin typeface="Times New Roman" pitchFamily="34" charset="0"/>
+                <a:ea typeface="Times New Roman" pitchFamily="34" charset="-122"/>
+                <a:cs typeface="Times New Roman" pitchFamily="34" charset="-120"/>
+              </a:rPr>
+              <a:t>Bad roads: </a:t>
+            </a:r>
+            <a:pPr algn="l" indent="0" marL="0">
+              <a:spcAft>
+                <a:spcPts val="800"/>
+              </a:spcAft>
+              <a:buNone/>
+            </a:pPr>
+            <a:r>
+              <a:rPr lang="en-US" sz="4000" dirty="0">
+                <a:solidFill>
+                  <a:srgbClr val="111111"/>
+                </a:solidFill>
+                <a:latin typeface="Times New Roman" pitchFamily="34" charset="0"/>
+                <a:ea typeface="Times New Roman" pitchFamily="34" charset="-122"/>
+                <a:cs typeface="Times New Roman" pitchFamily="34" charset="-120"/>
+              </a:rPr>
+              <a:t>Food spoils before reaching the market.</a:t>
             </a:r>
             <a:endParaRPr lang="en-US" sz="4000" dirty="0"/>
           </a:p>
@@ -13887,7 +14178,7 @@
                 <a:ea typeface="Times New Roman" pitchFamily="34" charset="-122"/>
                 <a:cs typeface="Times New Roman" pitchFamily="34" charset="-120"/>
               </a:rPr>
-              <a:t>1. Causes (continued)</a:t>
+              <a:t>1. Causes</a:t>
             </a:r>
             <a:endParaRPr lang="en-US" sz="3600" dirty="0"/>
           </a:p>
@@ -13901,8 +14192,47 @@
         </p:nvSpPr>
         <p:spPr>
           <a:xfrm>
-            <a:off x="5349240" y="1783080"/>
-            <a:ext cx="6522415" cy="4663440"/>
+            <a:off x="5349240" y="1737360"/>
+            <a:ext cx="6522415" cy="457200"/>
+          </a:xfrm>
+          <a:prstGeom prst="rect">
+            <a:avLst/>
+          </a:prstGeom>
+          <a:noFill/>
+          <a:ln/>
+        </p:spPr>
+        <p:txBody>
+          <a:bodyPr wrap="square" lIns="0" tIns="0" rIns="0" bIns="0" rtlCol="0" anchor="ctr"/>
+          <a:lstStyle/>
+          <a:p>
+            <a:pPr algn="l" indent="0" marL="0">
+              <a:buNone/>
+            </a:pPr>
+            <a:r>
+              <a:rPr lang="en-US" sz="3000" b="1" dirty="0">
+                <a:solidFill>
+                  <a:srgbClr val="990011"/>
+                </a:solidFill>
+                <a:latin typeface="Times New Roman" pitchFamily="34" charset="0"/>
+                <a:ea typeface="Times New Roman" pitchFamily="34" charset="-122"/>
+                <a:cs typeface="Times New Roman" pitchFamily="34" charset="-120"/>
+              </a:rPr>
+              <a:t>A) Causes of Food Loss (continued)</a:t>
+            </a:r>
+            <a:endParaRPr lang="en-US" sz="3000" dirty="0"/>
+          </a:p>
+        </p:txBody>
+      </p:sp>
+      <p:sp>
+        <p:nvSpPr>
+          <p:cNvPr id="6" name="Text 3"/>
+          <p:cNvSpPr/>
+          <p:nvPr/>
+        </p:nvSpPr>
+        <p:spPr>
+          <a:xfrm>
+            <a:off x="5349240" y="2240280"/>
+            <a:ext cx="6522415" cy="4206240"/>
           </a:xfrm>
           <a:prstGeom prst="rect">
             <a:avLst/>
@@ -13929,7 +14259,7 @@
                 <a:ea typeface="Times New Roman" pitchFamily="34" charset="-122"/>
                 <a:cs typeface="Times New Roman" pitchFamily="34" charset="-120"/>
               </a:rPr>
-              <a:t>Causes of waste: </a:t>
+              <a:t>Lack of processing: </a:t>
             </a:r>
             <a:pPr algn="l" indent="0" marL="0">
               <a:spcAft>
@@ -13946,7 +14276,7 @@
                 <a:ea typeface="Times New Roman" pitchFamily="34" charset="-122"/>
                 <a:cs typeface="Times New Roman" pitchFamily="34" charset="-120"/>
               </a:rPr>
-              <a:t>Buying too much, poor planning and throwing away leftovers cause food waste.</a:t>
+              <a:t>Fresh food cannot be kept for long.</a:t>
             </a:r>
             <a:endParaRPr lang="en-US" sz="4000" dirty="0"/>
           </a:p>
@@ -14081,7 +14411,7 @@
         <p:spPr>
           <a:xfrm>
             <a:off x="0" y="658368"/>
-            <a:ext cx="2468880" cy="5833872"/>
+            <a:ext cx="5120640" cy="5833872"/>
           </a:xfrm>
           <a:prstGeom prst="rect">
             <a:avLst/>
@@ -14096,8 +14426,8 @@
         </p:nvSpPr>
         <p:spPr>
           <a:xfrm>
-            <a:off x="2697480" y="1005840"/>
-            <a:ext cx="9174175" cy="731520"/>
+            <a:off x="5349240" y="1005840"/>
+            <a:ext cx="6522415" cy="731520"/>
           </a:xfrm>
           <a:prstGeom prst="rect">
             <a:avLst/>
@@ -14123,7 +14453,7 @@
                 <a:ea typeface="Times New Roman" pitchFamily="34" charset="-122"/>
                 <a:cs typeface="Times New Roman" pitchFamily="34" charset="-120"/>
               </a:rPr>
-              <a:t>2. Consequences</a:t>
+              <a:t>1. Causes</a:t>
             </a:r>
             <a:endParaRPr lang="en-US" sz="3600" dirty="0"/>
           </a:p>
@@ -14137,8 +14467,47 @@
         </p:nvSpPr>
         <p:spPr>
           <a:xfrm>
-            <a:off x="2697480" y="1783080"/>
-            <a:ext cx="9174175" cy="4663440"/>
+            <a:off x="5349240" y="1737360"/>
+            <a:ext cx="6522415" cy="457200"/>
+          </a:xfrm>
+          <a:prstGeom prst="rect">
+            <a:avLst/>
+          </a:prstGeom>
+          <a:noFill/>
+          <a:ln/>
+        </p:spPr>
+        <p:txBody>
+          <a:bodyPr wrap="square" lIns="0" tIns="0" rIns="0" bIns="0" rtlCol="0" anchor="ctr"/>
+          <a:lstStyle/>
+          <a:p>
+            <a:pPr algn="l" indent="0" marL="0">
+              <a:buNone/>
+            </a:pPr>
+            <a:r>
+              <a:rPr lang="en-US" sz="3200" b="1" dirty="0">
+                <a:solidFill>
+                  <a:srgbClr val="990011"/>
+                </a:solidFill>
+                <a:latin typeface="Times New Roman" pitchFamily="34" charset="0"/>
+                <a:ea typeface="Times New Roman" pitchFamily="34" charset="-122"/>
+                <a:cs typeface="Times New Roman" pitchFamily="34" charset="-120"/>
+              </a:rPr>
+              <a:t>B) Causes of Food Waste</a:t>
+            </a:r>
+            <a:endParaRPr lang="en-US" sz="3200" dirty="0"/>
+          </a:p>
+        </p:txBody>
+      </p:sp>
+      <p:sp>
+        <p:nvSpPr>
+          <p:cNvPr id="6" name="Text 3"/>
+          <p:cNvSpPr/>
+          <p:nvPr/>
+        </p:nvSpPr>
+        <p:spPr>
+          <a:xfrm>
+            <a:off x="5349240" y="2240280"/>
+            <a:ext cx="6522415" cy="4206240"/>
           </a:xfrm>
           <a:prstGeom prst="rect">
             <a:avLst/>
@@ -14165,7 +14534,7 @@
                 <a:ea typeface="Times New Roman" pitchFamily="34" charset="-122"/>
                 <a:cs typeface="Times New Roman" pitchFamily="34" charset="-120"/>
               </a:rPr>
-              <a:t>Food loss and waste have the following consequences:</a:t>
+              <a:t>Food is wasted for the following reasons:</a:t>
             </a:r>
             <a:endParaRPr lang="en-US" sz="4000" dirty="0"/>
           </a:p>
@@ -14185,7 +14554,7 @@
                 <a:ea typeface="Times New Roman" pitchFamily="34" charset="-122"/>
                 <a:cs typeface="Times New Roman" pitchFamily="34" charset="-120"/>
               </a:rPr>
-              <a:t>Social consequences: </a:t>
+              <a:t>Buying too much: </a:t>
             </a:r>
             <a:pPr algn="l" indent="0" marL="0">
               <a:spcAft>
@@ -14202,7 +14571,7 @@
                 <a:ea typeface="Times New Roman" pitchFamily="34" charset="-122"/>
                 <a:cs typeface="Times New Roman" pitchFamily="34" charset="-120"/>
               </a:rPr>
-              <a:t>Hunger remains while food is thrown away.</a:t>
+              <a:t>People buy more than they need.</a:t>
             </a:r>
             <a:endParaRPr lang="en-US" sz="4000" dirty="0"/>
           </a:p>
@@ -14222,7 +14591,7 @@
                 <a:ea typeface="Times New Roman" pitchFamily="34" charset="-122"/>
                 <a:cs typeface="Times New Roman" pitchFamily="34" charset="-120"/>
               </a:rPr>
-              <a:t>Economic and environmental consequences: </a:t>
+              <a:t>Poor planning: </a:t>
             </a:r>
             <a:pPr algn="l" indent="0" marL="0">
               <a:spcAft>
@@ -14239,7 +14608,7 @@
                 <a:ea typeface="Times New Roman" pitchFamily="34" charset="-122"/>
                 <a:cs typeface="Times New Roman" pitchFamily="34" charset="-120"/>
               </a:rPr>
-              <a:t>Money, water, land and energy are wasted and rotting food pollutes.</a:t>
+              <a:t>Meals are not planned, so food spoils.</a:t>
             </a:r>
             <a:endParaRPr lang="en-US" sz="4000" dirty="0"/>
           </a:p>
@@ -14374,7 +14743,7 @@
         <p:spPr>
           <a:xfrm>
             <a:off x="0" y="658368"/>
-            <a:ext cx="3840480" cy="5833872"/>
+            <a:ext cx="5120640" cy="5833872"/>
           </a:xfrm>
           <a:prstGeom prst="rect">
             <a:avLst/>
@@ -14389,8 +14758,8 @@
         </p:nvSpPr>
         <p:spPr>
           <a:xfrm>
-            <a:off x="4069080" y="1005840"/>
-            <a:ext cx="7802575" cy="731520"/>
+            <a:off x="5349240" y="1005840"/>
+            <a:ext cx="6522415" cy="731520"/>
           </a:xfrm>
           <a:prstGeom prst="rect">
             <a:avLst/>
@@ -14416,7 +14785,7 @@
                 <a:ea typeface="Times New Roman" pitchFamily="34" charset="-122"/>
                 <a:cs typeface="Times New Roman" pitchFamily="34" charset="-120"/>
               </a:rPr>
-              <a:t>3. Solutions</a:t>
+              <a:t>1. Causes</a:t>
             </a:r>
             <a:endParaRPr lang="en-US" sz="3600" dirty="0"/>
           </a:p>
@@ -14430,8 +14799,47 @@
         </p:nvSpPr>
         <p:spPr>
           <a:xfrm>
-            <a:off x="4069080" y="1783080"/>
-            <a:ext cx="7802575" cy="4663440"/>
+            <a:off x="5349240" y="1737360"/>
+            <a:ext cx="6522415" cy="457200"/>
+          </a:xfrm>
+          <a:prstGeom prst="rect">
+            <a:avLst/>
+          </a:prstGeom>
+          <a:noFill/>
+          <a:ln/>
+        </p:spPr>
+        <p:txBody>
+          <a:bodyPr wrap="square" lIns="0" tIns="0" rIns="0" bIns="0" rtlCol="0" anchor="ctr"/>
+          <a:lstStyle/>
+          <a:p>
+            <a:pPr algn="l" indent="0" marL="0">
+              <a:buNone/>
+            </a:pPr>
+            <a:r>
+              <a:rPr lang="en-US" sz="2900" b="1" dirty="0">
+                <a:solidFill>
+                  <a:srgbClr val="990011"/>
+                </a:solidFill>
+                <a:latin typeface="Times New Roman" pitchFamily="34" charset="0"/>
+                <a:ea typeface="Times New Roman" pitchFamily="34" charset="-122"/>
+                <a:cs typeface="Times New Roman" pitchFamily="34" charset="-120"/>
+              </a:rPr>
+              <a:t>B) Causes of Food Waste (continued)</a:t>
+            </a:r>
+            <a:endParaRPr lang="en-US" sz="2900" dirty="0"/>
+          </a:p>
+        </p:txBody>
+      </p:sp>
+      <p:sp>
+        <p:nvSpPr>
+          <p:cNvPr id="6" name="Text 3"/>
+          <p:cNvSpPr/>
+          <p:nvPr/>
+        </p:nvSpPr>
+        <p:spPr>
+          <a:xfrm>
+            <a:off x="5349240" y="2240280"/>
+            <a:ext cx="6522415" cy="4206240"/>
           </a:xfrm>
           <a:prstGeom prst="rect">
             <a:avLst/>
@@ -14450,7 +14858,7 @@
               <a:buNone/>
             </a:pPr>
             <a:r>
-              <a:rPr lang="en-US" sz="4000" i="1" dirty="0">
+              <a:rPr lang="en-US" sz="4000" b="1" dirty="0">
                 <a:solidFill>
                   <a:srgbClr val="111111"/>
                 </a:solidFill>
@@ -14458,11 +14866,8 @@
                 <a:ea typeface="Times New Roman" pitchFamily="34" charset="-122"/>
                 <a:cs typeface="Times New Roman" pitchFamily="34" charset="-120"/>
               </a:rPr>
-              <a:t>Food loss and waste can be reduced as follows:</a:t>
-            </a:r>
-            <a:endParaRPr lang="en-US" sz="4000" dirty="0"/>
-          </a:p>
-          <a:p>
+              <a:t>Throwing away leftovers: </a:t>
+            </a:r>
             <a:pPr algn="l" indent="0" marL="0">
               <a:spcAft>
                 <a:spcPts val="800"/>
@@ -14470,7 +14875,7 @@
               <a:buNone/>
             </a:pPr>
             <a:r>
-              <a:rPr lang="en-US" sz="4000" b="1" dirty="0">
+              <a:rPr lang="en-US" sz="4000" dirty="0">
                 <a:solidFill>
                   <a:srgbClr val="111111"/>
                 </a:solidFill>
@@ -14478,61 +14883,7 @@
                 <a:ea typeface="Times New Roman" pitchFamily="34" charset="-122"/>
                 <a:cs typeface="Times New Roman" pitchFamily="34" charset="-120"/>
               </a:rPr>
-              <a:t>Better storage and processing: </a:t>
-            </a:r>
-            <a:pPr algn="l" indent="0" marL="0">
-              <a:spcAft>
-                <a:spcPts val="800"/>
-              </a:spcAft>
-              <a:buNone/>
-            </a:pPr>
-            <a:r>
-              <a:rPr lang="en-US" sz="4000" dirty="0">
-                <a:solidFill>
-                  <a:srgbClr val="111111"/>
-                </a:solidFill>
-                <a:latin typeface="Times New Roman" pitchFamily="34" charset="0"/>
-                <a:ea typeface="Times New Roman" pitchFamily="34" charset="-122"/>
-                <a:cs typeface="Times New Roman" pitchFamily="34" charset="-120"/>
-              </a:rPr>
-              <a:t>Granaries, drying and processing keep food longer.</a:t>
-            </a:r>
-            <a:endParaRPr lang="en-US" sz="4000" dirty="0"/>
-          </a:p>
-          <a:p>
-            <a:pPr algn="l" indent="0" marL="0">
-              <a:spcAft>
-                <a:spcPts val="800"/>
-              </a:spcAft>
-              <a:buNone/>
-            </a:pPr>
-            <a:r>
-              <a:rPr lang="en-US" sz="4000" b="1" dirty="0">
-                <a:solidFill>
-                  <a:srgbClr val="111111"/>
-                </a:solidFill>
-                <a:latin typeface="Times New Roman" pitchFamily="34" charset="0"/>
-                <a:ea typeface="Times New Roman" pitchFamily="34" charset="-122"/>
-                <a:cs typeface="Times New Roman" pitchFamily="34" charset="-120"/>
-              </a:rPr>
-              <a:t>Good roads and markets: </a:t>
-            </a:r>
-            <a:pPr algn="l" indent="0" marL="0">
-              <a:spcAft>
-                <a:spcPts val="800"/>
-              </a:spcAft>
-              <a:buNone/>
-            </a:pPr>
-            <a:r>
-              <a:rPr lang="en-US" sz="4000" dirty="0">
-                <a:solidFill>
-                  <a:srgbClr val="111111"/>
-                </a:solidFill>
-                <a:latin typeface="Times New Roman" pitchFamily="34" charset="0"/>
-                <a:ea typeface="Times New Roman" pitchFamily="34" charset="-122"/>
-                <a:cs typeface="Times New Roman" pitchFamily="34" charset="-120"/>
-              </a:rPr>
-              <a:t>They bring food quickly to consumers.</a:t>
+              <a:t>Good food is thrown in the bin.</a:t>
             </a:r>
             <a:endParaRPr lang="en-US" sz="4000" dirty="0"/>
           </a:p>
@@ -14667,7 +15018,7 @@
         <p:spPr>
           <a:xfrm>
             <a:off x="0" y="658368"/>
-            <a:ext cx="5120640" cy="5833872"/>
+            <a:ext cx="2468880" cy="5833872"/>
           </a:xfrm>
           <a:prstGeom prst="rect">
             <a:avLst/>
@@ -14682,8 +15033,8 @@
         </p:nvSpPr>
         <p:spPr>
           <a:xfrm>
-            <a:off x="5349240" y="1005840"/>
-            <a:ext cx="6522415" cy="731520"/>
+            <a:off x="2697480" y="1005840"/>
+            <a:ext cx="9174175" cy="731520"/>
           </a:xfrm>
           <a:prstGeom prst="rect">
             <a:avLst/>
@@ -14709,7 +15060,7 @@
                 <a:ea typeface="Times New Roman" pitchFamily="34" charset="-122"/>
                 <a:cs typeface="Times New Roman" pitchFamily="34" charset="-120"/>
               </a:rPr>
-              <a:t>3. Solutions (continued)</a:t>
+              <a:t>2. Consequences</a:t>
             </a:r>
             <a:endParaRPr lang="en-US" sz="3600" dirty="0"/>
           </a:p>
@@ -14723,8 +15074,8 @@
         </p:nvSpPr>
         <p:spPr>
           <a:xfrm>
-            <a:off x="5349240" y="1783080"/>
-            <a:ext cx="6522415" cy="4663440"/>
+            <a:off x="2697480" y="1783080"/>
+            <a:ext cx="9174175" cy="4663440"/>
           </a:xfrm>
           <a:prstGeom prst="rect">
             <a:avLst/>
@@ -14743,7 +15094,7 @@
               <a:buNone/>
             </a:pPr>
             <a:r>
-              <a:rPr lang="en-US" sz="4000" b="1" dirty="0">
+              <a:rPr lang="en-US" sz="4000" i="1" dirty="0">
                 <a:solidFill>
                   <a:srgbClr val="111111"/>
                 </a:solidFill>
@@ -14751,8 +15102,11 @@
                 <a:ea typeface="Times New Roman" pitchFamily="34" charset="-122"/>
                 <a:cs typeface="Times New Roman" pitchFamily="34" charset="-120"/>
               </a:rPr>
-              <a:t>Good habits: </a:t>
-            </a:r>
+              <a:t>Food loss and waste have the following consequences:</a:t>
+            </a:r>
+            <a:endParaRPr lang="en-US" sz="4000" dirty="0"/>
+          </a:p>
+          <a:p>
             <a:pPr algn="l" indent="0" marL="0">
               <a:spcAft>
                 <a:spcPts val="800"/>
@@ -14760,7 +15114,7 @@
               <a:buNone/>
             </a:pPr>
             <a:r>
-              <a:rPr lang="en-US" sz="4000" dirty="0">
+              <a:rPr lang="en-US" sz="4000" b="1" dirty="0">
                 <a:solidFill>
                   <a:srgbClr val="111111"/>
                 </a:solidFill>
@@ -14768,7 +15122,61 @@
                 <a:ea typeface="Times New Roman" pitchFamily="34" charset="-122"/>
                 <a:cs typeface="Times New Roman" pitchFamily="34" charset="-120"/>
               </a:rPr>
-              <a:t>People buy what they need and use leftovers.</a:t>
+              <a:t>Social consequences: </a:t>
+            </a:r>
+            <a:pPr algn="l" indent="0" marL="0">
+              <a:spcAft>
+                <a:spcPts val="800"/>
+              </a:spcAft>
+              <a:buNone/>
+            </a:pPr>
+            <a:r>
+              <a:rPr lang="en-US" sz="4000" dirty="0">
+                <a:solidFill>
+                  <a:srgbClr val="111111"/>
+                </a:solidFill>
+                <a:latin typeface="Times New Roman" pitchFamily="34" charset="0"/>
+                <a:ea typeface="Times New Roman" pitchFamily="34" charset="-122"/>
+                <a:cs typeface="Times New Roman" pitchFamily="34" charset="-120"/>
+              </a:rPr>
+              <a:t>Hunger remains while food is thrown away.</a:t>
+            </a:r>
+            <a:endParaRPr lang="en-US" sz="4000" dirty="0"/>
+          </a:p>
+          <a:p>
+            <a:pPr algn="l" indent="0" marL="0">
+              <a:spcAft>
+                <a:spcPts val="800"/>
+              </a:spcAft>
+              <a:buNone/>
+            </a:pPr>
+            <a:r>
+              <a:rPr lang="en-US" sz="4000" b="1" dirty="0">
+                <a:solidFill>
+                  <a:srgbClr val="111111"/>
+                </a:solidFill>
+                <a:latin typeface="Times New Roman" pitchFamily="34" charset="0"/>
+                <a:ea typeface="Times New Roman" pitchFamily="34" charset="-122"/>
+                <a:cs typeface="Times New Roman" pitchFamily="34" charset="-120"/>
+              </a:rPr>
+              <a:t>Economic and environmental consequences: </a:t>
+            </a:r>
+            <a:pPr algn="l" indent="0" marL="0">
+              <a:spcAft>
+                <a:spcPts val="800"/>
+              </a:spcAft>
+              <a:buNone/>
+            </a:pPr>
+            <a:r>
+              <a:rPr lang="en-US" sz="4000" dirty="0">
+                <a:solidFill>
+                  <a:srgbClr val="111111"/>
+                </a:solidFill>
+                <a:latin typeface="Times New Roman" pitchFamily="34" charset="0"/>
+                <a:ea typeface="Times New Roman" pitchFamily="34" charset="-122"/>
+                <a:cs typeface="Times New Roman" pitchFamily="34" charset="-120"/>
+              </a:rPr>
+              <a:t>Money, water, land and energy are wasted and rotting food pollutes.</a:t>
             </a:r>
             <a:endParaRPr lang="en-US" sz="4000" dirty="0"/>
           </a:p>
@@ -15125,48 +15533,9 @@
           </a:p>
         </p:txBody>
       </p:sp>
-      <p:sp>
-        <p:nvSpPr>
-          <p:cNvPr id="3" name="Text 1"/>
-          <p:cNvSpPr/>
-          <p:nvPr/>
-        </p:nvSpPr>
-        <p:spPr>
-          <a:xfrm>
-            <a:off x="457200" y="1005840"/>
-            <a:ext cx="11277295" cy="731520"/>
-          </a:xfrm>
-          <a:prstGeom prst="rect">
-            <a:avLst/>
-          </a:prstGeom>
-          <a:noFill/>
-          <a:ln/>
-        </p:spPr>
-        <p:txBody>
-          <a:bodyPr wrap="square" lIns="0" tIns="0" rIns="0" bIns="0" rtlCol="0" anchor="ctr"/>
-          <a:lstStyle/>
-          <a:p>
-            <a:pPr algn="ctr" indent="0" marL="0">
-              <a:buNone/>
-            </a:pPr>
-            <a:r>
-              <a:rPr lang="en-US" sz="3600" b="1" dirty="0">
-                <a:solidFill>
-                  <a:srgbClr val="990011"/>
-                </a:solidFill>
-                <a:latin typeface="Times New Roman" pitchFamily="34" charset="0"/>
-                <a:ea typeface="Times New Roman" pitchFamily="34" charset="-122"/>
-                <a:cs typeface="Times New Roman" pitchFamily="34" charset="-120"/>
-              </a:rPr>
-              <a:t>3. Solutions</a:t>
-            </a:r>
-            <a:endParaRPr lang="en-US" sz="3600" dirty="0"/>
-          </a:p>
-        </p:txBody>
-      </p:sp>
       <p:pic>
         <p:nvPicPr>
-          <p:cNvPr id="4" name="Image 0" descr="/home/claude/f4/img/v2/food_solutions_big.png">    </p:cNvPr>
+          <p:cNvPr id="3" name="Image 0" descr="/home/claude/f4/img/minesec_sheet.png">    </p:cNvPr>
           <p:cNvPicPr>
             <a:picLocks noChangeAspect="1"/>
           </p:cNvPicPr>
@@ -15180,8 +15549,8 @@
         </p:blipFill>
         <p:spPr>
           <a:xfrm>
-            <a:off x="629930" y="1783080"/>
-            <a:ext cx="10931835" cy="4270248"/>
+            <a:off x="0" y="658368"/>
+            <a:ext cx="3840480" cy="5833872"/>
           </a:xfrm>
           <a:prstGeom prst="rect">
             <a:avLst/>
@@ -15190,14 +15559,14 @@
       </p:pic>
       <p:sp>
         <p:nvSpPr>
-          <p:cNvPr id="5" name="Text 2"/>
+          <p:cNvPr id="4" name="Text 1"/>
           <p:cNvSpPr/>
           <p:nvPr/>
         </p:nvSpPr>
         <p:spPr>
           <a:xfrm>
-            <a:off x="457200" y="6089904"/>
-            <a:ext cx="11277295" cy="347472"/>
+            <a:off x="4069080" y="1005840"/>
+            <a:ext cx="7802575" cy="731520"/>
           </a:xfrm>
           <a:prstGeom prst="rect">
             <a:avLst/>
@@ -15206,24 +15575,142 @@
           <a:ln/>
         </p:spPr>
         <p:txBody>
-          <a:bodyPr wrap="square" lIns="0" tIns="0" rIns="0" bIns="0" rtlCol="0" anchor="ctr"/>
+          <a:bodyPr wrap="square" lIns="0" tIns="0" rIns="0" bIns="0" rtlCol="0" anchor="ctr">
+            <a:normAutofit/>
+          </a:bodyPr>
           <a:lstStyle/>
           <a:p>
             <a:pPr algn="ctr" indent="0" marL="0">
               <a:buNone/>
             </a:pPr>
             <a:r>
-              <a:rPr lang="en-US" sz="1800" i="1" dirty="0">
-                <a:solidFill>
-                  <a:srgbClr val="555555"/>
+              <a:rPr lang="en-US" sz="3600" b="1" dirty="0">
+                <a:solidFill>
+                  <a:srgbClr val="990011"/>
                 </a:solidFill>
                 <a:latin typeface="Times New Roman" pitchFamily="34" charset="0"/>
                 <a:ea typeface="Times New Roman" pitchFamily="34" charset="-122"/>
                 <a:cs typeface="Times New Roman" pitchFamily="34" charset="-120"/>
               </a:rPr>
-              <a:t>Illustration: food solutions</a:t>
-            </a:r>
-            <a:endParaRPr lang="en-US" sz="1800" dirty="0"/>
+              <a:t>3. Solutions</a:t>
+            </a:r>
+            <a:endParaRPr lang="en-US" sz="3600" dirty="0"/>
+          </a:p>
+        </p:txBody>
+      </p:sp>
+      <p:sp>
+        <p:nvSpPr>
+          <p:cNvPr id="5" name="Text 2"/>
+          <p:cNvSpPr/>
+          <p:nvPr/>
+        </p:nvSpPr>
+        <p:spPr>
+          <a:xfrm>
+            <a:off x="4069080" y="1783080"/>
+            <a:ext cx="7802575" cy="4663440"/>
+          </a:xfrm>
+          <a:prstGeom prst="rect">
+            <a:avLst/>
+          </a:prstGeom>
+          <a:noFill/>
+          <a:ln/>
+        </p:spPr>
+        <p:txBody>
+          <a:bodyPr wrap="square" lIns="0" tIns="0" rIns="0" bIns="0" rtlCol="0" anchor="t"/>
+          <a:lstStyle/>
+          <a:p>
+            <a:pPr algn="l" indent="0" marL="0">
+              <a:spcAft>
+                <a:spcPts val="800"/>
+              </a:spcAft>
+              <a:buNone/>
+            </a:pPr>
+            <a:r>
+              <a:rPr lang="en-US" sz="4000" i="1" dirty="0">
+                <a:solidFill>
+                  <a:srgbClr val="111111"/>
+                </a:solidFill>
+                <a:latin typeface="Times New Roman" pitchFamily="34" charset="0"/>
+                <a:ea typeface="Times New Roman" pitchFamily="34" charset="-122"/>
+                <a:cs typeface="Times New Roman" pitchFamily="34" charset="-120"/>
+              </a:rPr>
+              <a:t>Food loss and waste can be reduced as follows:</a:t>
+            </a:r>
+            <a:endParaRPr lang="en-US" sz="4000" dirty="0"/>
+          </a:p>
+          <a:p>
+            <a:pPr algn="l" indent="0" marL="0">
+              <a:spcAft>
+                <a:spcPts val="800"/>
+              </a:spcAft>
+              <a:buNone/>
+            </a:pPr>
+            <a:r>
+              <a:rPr lang="en-US" sz="4000" b="1" dirty="0">
+                <a:solidFill>
+                  <a:srgbClr val="111111"/>
+                </a:solidFill>
+                <a:latin typeface="Times New Roman" pitchFamily="34" charset="0"/>
+                <a:ea typeface="Times New Roman" pitchFamily="34" charset="-122"/>
+                <a:cs typeface="Times New Roman" pitchFamily="34" charset="-120"/>
+              </a:rPr>
+              <a:t>Better storage and processing: </a:t>
+            </a:r>
+            <a:pPr algn="l" indent="0" marL="0">
+              <a:spcAft>
+                <a:spcPts val="800"/>
+              </a:spcAft>
+              <a:buNone/>
+            </a:pPr>
+            <a:r>
+              <a:rPr lang="en-US" sz="4000" dirty="0">
+                <a:solidFill>
+                  <a:srgbClr val="111111"/>
+                </a:solidFill>
+                <a:latin typeface="Times New Roman" pitchFamily="34" charset="0"/>
+                <a:ea typeface="Times New Roman" pitchFamily="34" charset="-122"/>
+                <a:cs typeface="Times New Roman" pitchFamily="34" charset="-120"/>
+              </a:rPr>
+              <a:t>Granaries, drying and processing keep food longer.</a:t>
+            </a:r>
+            <a:endParaRPr lang="en-US" sz="4000" dirty="0"/>
+          </a:p>
+          <a:p>
+            <a:pPr algn="l" indent="0" marL="0">
+              <a:spcAft>
+                <a:spcPts val="800"/>
+              </a:spcAft>
+              <a:buNone/>
+            </a:pPr>
+            <a:r>
+              <a:rPr lang="en-US" sz="4000" b="1" dirty="0">
+                <a:solidFill>
+                  <a:srgbClr val="111111"/>
+                </a:solidFill>
+                <a:latin typeface="Times New Roman" pitchFamily="34" charset="0"/>
+                <a:ea typeface="Times New Roman" pitchFamily="34" charset="-122"/>
+                <a:cs typeface="Times New Roman" pitchFamily="34" charset="-120"/>
+              </a:rPr>
+              <a:t>Good roads and markets: </a:t>
+            </a:r>
+            <a:pPr algn="l" indent="0" marL="0">
+              <a:spcAft>
+                <a:spcPts val="800"/>
+              </a:spcAft>
+              <a:buNone/>
+            </a:pPr>
+            <a:r>
+              <a:rPr lang="en-US" sz="4000" dirty="0">
+                <a:solidFill>
+                  <a:srgbClr val="111111"/>
+                </a:solidFill>
+                <a:latin typeface="Times New Roman" pitchFamily="34" charset="0"/>
+                <a:ea typeface="Times New Roman" pitchFamily="34" charset="-122"/>
+                <a:cs typeface="Times New Roman" pitchFamily="34" charset="-120"/>
+              </a:rPr>
+              <a:t>They bring food quickly to consumers.</a:t>
+            </a:r>
+            <a:endParaRPr lang="en-US" sz="4000" dirty="0"/>
           </a:p>
         </p:txBody>
       </p:sp>
@@ -15333,7 +15820,7 @@
                 <a:ea typeface="Calibri" pitchFamily="34" charset="-122"/>
                 <a:cs typeface="Calibri" pitchFamily="34" charset="-120"/>
               </a:rPr>
-              <a:t>FORMATIVE EVALUATION</a:t>
+              <a:t>BOARD SUMMARY</a:t>
             </a:r>
             <a:endParaRPr lang="en-US" sz="1400" dirty="0"/>
           </a:p>
@@ -15398,7 +15885,7 @@
                 <a:ea typeface="Times New Roman" pitchFamily="34" charset="-122"/>
                 <a:cs typeface="Times New Roman" pitchFamily="34" charset="-120"/>
               </a:rPr>
-              <a:t>Evaluation 1</a:t>
+              <a:t>3. Solutions (continued)</a:t>
             </a:r>
             <a:endParaRPr lang="en-US" sz="3600" dirty="0"/>
           </a:p>
@@ -15432,7 +15919,7 @@
               <a:buNone/>
             </a:pPr>
             <a:r>
-              <a:rPr lang="en-US" sz="4000" dirty="0">
+              <a:rPr lang="en-US" sz="4000" b="1" dirty="0">
                 <a:solidFill>
                   <a:srgbClr val="111111"/>
                 </a:solidFill>
@@ -15440,7 +15927,24 @@
                 <a:ea typeface="Times New Roman" pitchFamily="34" charset="-122"/>
                 <a:cs typeface="Times New Roman" pitchFamily="34" charset="-120"/>
               </a:rPr>
-              <a:t>Distinguish food loss and food waste.</a:t>
+              <a:t>Good habits: </a:t>
+            </a:r>
+            <a:pPr algn="l" indent="0" marL="0">
+              <a:spcAft>
+                <a:spcPts val="800"/>
+              </a:spcAft>
+              <a:buNone/>
+            </a:pPr>
+            <a:r>
+              <a:rPr lang="en-US" sz="4000" dirty="0">
+                <a:solidFill>
+                  <a:srgbClr val="111111"/>
+                </a:solidFill>
+                <a:latin typeface="Times New Roman" pitchFamily="34" charset="0"/>
+                <a:ea typeface="Times New Roman" pitchFamily="34" charset="-122"/>
+                <a:cs typeface="Times New Roman" pitchFamily="34" charset="-120"/>
+              </a:rPr>
+              <a:t>People buy what they need and use leftovers.</a:t>
             </a:r>
             <a:endParaRPr lang="en-US" sz="4000" dirty="0"/>
           </a:p>
@@ -15552,15 +16056,54 @@
                 <a:ea typeface="Calibri" pitchFamily="34" charset="-122"/>
                 <a:cs typeface="Calibri" pitchFamily="34" charset="-120"/>
               </a:rPr>
-              <a:t>FORMATIVE EVALUATION</a:t>
+              <a:t>BOARD SUMMARY</a:t>
             </a:r>
             <a:endParaRPr lang="en-US" sz="1400" dirty="0"/>
+          </a:p>
+        </p:txBody>
+      </p:sp>
+      <p:sp>
+        <p:nvSpPr>
+          <p:cNvPr id="3" name="Text 1"/>
+          <p:cNvSpPr/>
+          <p:nvPr/>
+        </p:nvSpPr>
+        <p:spPr>
+          <a:xfrm>
+            <a:off x="457200" y="1005840"/>
+            <a:ext cx="11277295" cy="731520"/>
+          </a:xfrm>
+          <a:prstGeom prst="rect">
+            <a:avLst/>
+          </a:prstGeom>
+          <a:noFill/>
+          <a:ln/>
+        </p:spPr>
+        <p:txBody>
+          <a:bodyPr wrap="square" lIns="0" tIns="0" rIns="0" bIns="0" rtlCol="0" anchor="ctr"/>
+          <a:lstStyle/>
+          <a:p>
+            <a:pPr algn="ctr" indent="0" marL="0">
+              <a:buNone/>
+            </a:pPr>
+            <a:r>
+              <a:rPr lang="en-US" sz="3600" b="1" dirty="0">
+                <a:solidFill>
+                  <a:srgbClr val="990011"/>
+                </a:solidFill>
+                <a:latin typeface="Times New Roman" pitchFamily="34" charset="0"/>
+                <a:ea typeface="Times New Roman" pitchFamily="34" charset="-122"/>
+                <a:cs typeface="Times New Roman" pitchFamily="34" charset="-120"/>
+              </a:rPr>
+              <a:t>3. Solutions</a:t>
+            </a:r>
+            <a:endParaRPr lang="en-US" sz="3600" dirty="0"/>
           </a:p>
         </p:txBody>
       </p:sp>
       <p:pic>
         <p:nvPicPr>
-          <p:cNvPr id="3" name="Image 0" descr="/home/claude/f4/img/minesec_sheet.png">    </p:cNvPr>
+          <p:cNvPr id="4" name="Image 0" descr="/home/claude/f4/img/v2/food_solutions_big.png">    </p:cNvPr>
           <p:cNvPicPr>
             <a:picLocks noChangeAspect="1"/>
           </p:cNvPicPr>
@@ -15574,8 +16117,8 @@
         </p:blipFill>
         <p:spPr>
           <a:xfrm>
-            <a:off x="0" y="658368"/>
-            <a:ext cx="5120640" cy="5833872"/>
+            <a:off x="629930" y="1783080"/>
+            <a:ext cx="10931835" cy="4270248"/>
           </a:xfrm>
           <a:prstGeom prst="rect">
             <a:avLst/>
@@ -15584,14 +16127,14 @@
       </p:pic>
       <p:sp>
         <p:nvSpPr>
-          <p:cNvPr id="4" name="Text 1"/>
+          <p:cNvPr id="5" name="Text 2"/>
           <p:cNvSpPr/>
           <p:nvPr/>
         </p:nvSpPr>
         <p:spPr>
           <a:xfrm>
-            <a:off x="5349240" y="1005840"/>
-            <a:ext cx="6522415" cy="731520"/>
+            <a:off x="457200" y="6089904"/>
+            <a:ext cx="11277295" cy="347472"/>
           </a:xfrm>
           <a:prstGeom prst="rect">
             <a:avLst/>
@@ -15600,68 +16143,24 @@
           <a:ln/>
         </p:spPr>
         <p:txBody>
-          <a:bodyPr wrap="square" lIns="0" tIns="0" rIns="0" bIns="0" rtlCol="0" anchor="ctr">
-            <a:normAutofit/>
-          </a:bodyPr>
+          <a:bodyPr wrap="square" lIns="0" tIns="0" rIns="0" bIns="0" rtlCol="0" anchor="ctr"/>
           <a:lstStyle/>
           <a:p>
             <a:pPr algn="ctr" indent="0" marL="0">
               <a:buNone/>
             </a:pPr>
             <a:r>
-              <a:rPr lang="en-US" sz="3600" b="1" dirty="0">
-                <a:solidFill>
-                  <a:srgbClr val="990011"/>
+              <a:rPr lang="en-US" sz="1800" i="1" dirty="0">
+                <a:solidFill>
+                  <a:srgbClr val="555555"/>
                 </a:solidFill>
                 <a:latin typeface="Times New Roman" pitchFamily="34" charset="0"/>
                 <a:ea typeface="Times New Roman" pitchFamily="34" charset="-122"/>
                 <a:cs typeface="Times New Roman" pitchFamily="34" charset="-120"/>
               </a:rPr>
-              <a:t>Expected Answer</a:t>
-            </a:r>
-            <a:endParaRPr lang="en-US" sz="3600" dirty="0"/>
-          </a:p>
-        </p:txBody>
-      </p:sp>
-      <p:sp>
-        <p:nvSpPr>
-          <p:cNvPr id="5" name="Text 2"/>
-          <p:cNvSpPr/>
-          <p:nvPr/>
-        </p:nvSpPr>
-        <p:spPr>
-          <a:xfrm>
-            <a:off x="5349240" y="1783080"/>
-            <a:ext cx="6522415" cy="4663440"/>
-          </a:xfrm>
-          <a:prstGeom prst="rect">
-            <a:avLst/>
-          </a:prstGeom>
-          <a:noFill/>
-          <a:ln/>
-        </p:spPr>
-        <p:txBody>
-          <a:bodyPr wrap="square" lIns="0" tIns="0" rIns="0" bIns="0" rtlCol="0" anchor="t"/>
-          <a:lstStyle/>
-          <a:p>
-            <a:pPr algn="l" indent="0" marL="0">
-              <a:spcAft>
-                <a:spcPts val="800"/>
-              </a:spcAft>
-              <a:buNone/>
-            </a:pPr>
-            <a:r>
-              <a:rPr lang="en-US" sz="4000" dirty="0">
-                <a:solidFill>
-                  <a:srgbClr val="111111"/>
-                </a:solidFill>
-                <a:latin typeface="Times New Roman" pitchFamily="34" charset="0"/>
-                <a:ea typeface="Times New Roman" pitchFamily="34" charset="-122"/>
-                <a:cs typeface="Times New Roman" pitchFamily="34" charset="-120"/>
-              </a:rPr>
-              <a:t>Loss: during production and transport. Waste: in shops and homes.</a:t>
-            </a:r>
-            <a:endParaRPr lang="en-US" sz="4000" dirty="0"/>
+              <a:t>Illustration: food solutions</a:t>
+            </a:r>
+            <a:endParaRPr lang="en-US" sz="1800" dirty="0"/>
           </a:p>
         </p:txBody>
       </p:sp>
@@ -15836,7 +16335,7 @@
                 <a:ea typeface="Times New Roman" pitchFamily="34" charset="-122"/>
                 <a:cs typeface="Times New Roman" pitchFamily="34" charset="-120"/>
               </a:rPr>
-              <a:t>Evaluation 2</a:t>
+              <a:t>Evaluation 1</a:t>
             </a:r>
             <a:endParaRPr lang="en-US" sz="3600" dirty="0"/>
           </a:p>
@@ -15878,7 +16377,7 @@
                 <a:ea typeface="Times New Roman" pitchFamily="34" charset="-122"/>
                 <a:cs typeface="Times New Roman" pitchFamily="34" charset="-120"/>
               </a:rPr>
-              <a:t>Give two solutions.</a:t>
+              <a:t>Distinguish food loss and food waste.</a:t>
             </a:r>
             <a:endParaRPr lang="en-US" sz="4000" dirty="0"/>
           </a:p>
@@ -16097,7 +16596,7 @@
                 <a:ea typeface="Times New Roman" pitchFamily="34" charset="-122"/>
                 <a:cs typeface="Times New Roman" pitchFamily="34" charset="-120"/>
               </a:rPr>
-              <a:t>Better storage and buying only what we need.</a:t>
+              <a:t>Loss: during production and transport. Waste: in shops and homes.</a:t>
             </a:r>
             <a:endParaRPr lang="en-US" sz="4000" dirty="0"/>
           </a:p>
@@ -16209,7 +16708,7 @@
                 <a:ea typeface="Calibri" pitchFamily="34" charset="-122"/>
                 <a:cs typeface="Calibri" pitchFamily="34" charset="-120"/>
               </a:rPr>
-              <a:t>REMEDIATION</a:t>
+              <a:t>FORMATIVE EVALUATION</a:t>
             </a:r>
             <a:endParaRPr lang="en-US" sz="1400" dirty="0"/>
           </a:p>
@@ -16232,7 +16731,7 @@
         <p:spPr>
           <a:xfrm>
             <a:off x="0" y="658368"/>
-            <a:ext cx="2468880" cy="5833872"/>
+            <a:ext cx="5120640" cy="5833872"/>
           </a:xfrm>
           <a:prstGeom prst="rect">
             <a:avLst/>
@@ -16247,8 +16746,8 @@
         </p:nvSpPr>
         <p:spPr>
           <a:xfrm>
-            <a:off x="2697480" y="1005840"/>
-            <a:ext cx="9174175" cy="731520"/>
+            <a:off x="5349240" y="1005840"/>
+            <a:ext cx="6522415" cy="731520"/>
           </a:xfrm>
           <a:prstGeom prst="rect">
             <a:avLst/>
@@ -16274,7 +16773,7 @@
                 <a:ea typeface="Times New Roman" pitchFamily="34" charset="-122"/>
                 <a:cs typeface="Times New Roman" pitchFamily="34" charset="-120"/>
               </a:rPr>
-              <a:t>Remediation</a:t>
+              <a:t>Evaluation 2</a:t>
             </a:r>
             <a:endParaRPr lang="en-US" sz="3600" dirty="0"/>
           </a:p>
@@ -16288,8 +16787,8 @@
         </p:nvSpPr>
         <p:spPr>
           <a:xfrm>
-            <a:off x="2697480" y="1783080"/>
-            <a:ext cx="9174175" cy="4663440"/>
+            <a:off x="5349240" y="1783080"/>
+            <a:ext cx="6522415" cy="4663440"/>
           </a:xfrm>
           <a:prstGeom prst="rect">
             <a:avLst/>
@@ -16308,7 +16807,7 @@
               <a:buNone/>
             </a:pPr>
             <a:r>
-              <a:rPr lang="en-US" sz="4000" b="1" dirty="0">
+              <a:rPr lang="en-US" sz="4000" dirty="0">
                 <a:solidFill>
                   <a:srgbClr val="111111"/>
                 </a:solidFill>
@@ -16316,73 +16815,7 @@
                 <a:ea typeface="Times New Roman" pitchFamily="34" charset="-122"/>
                 <a:cs typeface="Times New Roman" pitchFamily="34" charset="-120"/>
               </a:rPr>
-              <a:t>Fill in the blanks:</a:t>
-            </a:r>
-            <a:endParaRPr lang="en-US" sz="4000" dirty="0"/>
-          </a:p>
-          <a:p>
-            <a:pPr algn="l" marL="342900" indent="-342900">
-              <a:spcAft>
-                <a:spcPts val="800"/>
-              </a:spcAft>
-              <a:buSzPct val="100000"/>
-              <a:buFont typeface="+mj-lt"/>
-              <a:buAutoNum type="arabicPeriod" startAt="1"/>
-            </a:pPr>
-            <a:r>
-              <a:rPr lang="en-US" sz="4000" dirty="0">
-                <a:solidFill>
-                  <a:srgbClr val="111111"/>
-                </a:solidFill>
-                <a:latin typeface="Times New Roman" pitchFamily="34" charset="0"/>
-                <a:ea typeface="Times New Roman" pitchFamily="34" charset="-122"/>
-                <a:cs typeface="Times New Roman" pitchFamily="34" charset="-120"/>
-              </a:rPr>
-              <a:t>Food rotting in storage is food ______.</a:t>
-            </a:r>
-            <a:endParaRPr lang="en-US" sz="4000" dirty="0"/>
-          </a:p>
-          <a:p>
-            <a:pPr algn="l" marL="342900" indent="-342900">
-              <a:spcAft>
-                <a:spcPts val="800"/>
-              </a:spcAft>
-              <a:buSzPct val="100000"/>
-              <a:buFont typeface="+mj-lt"/>
-              <a:buAutoNum type="arabicPeriod" startAt="1"/>
-            </a:pPr>
-            <a:r>
-              <a:rPr lang="en-US" sz="4000" dirty="0">
-                <a:solidFill>
-                  <a:srgbClr val="111111"/>
-                </a:solidFill>
-                <a:latin typeface="Times New Roman" pitchFamily="34" charset="0"/>
-                <a:ea typeface="Times New Roman" pitchFamily="34" charset="-122"/>
-                <a:cs typeface="Times New Roman" pitchFamily="34" charset="-120"/>
-              </a:rPr>
-              <a:t>Food thrown away at home is food ______.</a:t>
-            </a:r>
-            <a:endParaRPr lang="en-US" sz="4000" dirty="0"/>
-          </a:p>
-          <a:p>
-            <a:pPr algn="l" marL="342900" indent="-342900">
-              <a:spcAft>
-                <a:spcPts val="800"/>
-              </a:spcAft>
-              <a:buSzPct val="100000"/>
-              <a:buFont typeface="+mj-lt"/>
-              <a:buAutoNum type="arabicPeriod" startAt="1"/>
-            </a:pPr>
-            <a:r>
-              <a:rPr lang="en-US" sz="4000" dirty="0">
-                <a:solidFill>
-                  <a:srgbClr val="111111"/>
-                </a:solidFill>
-                <a:latin typeface="Times New Roman" pitchFamily="34" charset="0"/>
-                <a:ea typeface="Times New Roman" pitchFamily="34" charset="-122"/>
-                <a:cs typeface="Times New Roman" pitchFamily="34" charset="-120"/>
-              </a:rPr>
-              <a:t>Drying tomatoes is a form of ______.</a:t>
+              <a:t>Give two solutions.</a:t>
             </a:r>
             <a:endParaRPr lang="en-US" sz="4000" dirty="0"/>
           </a:p>
@@ -16494,7 +16927,7 @@
                 <a:ea typeface="Calibri" pitchFamily="34" charset="-122"/>
                 <a:cs typeface="Calibri" pitchFamily="34" charset="-120"/>
               </a:rPr>
-              <a:t>HOMEWORK</a:t>
+              <a:t>FORMATIVE EVALUATION</a:t>
             </a:r>
             <a:endParaRPr lang="en-US" sz="1400" dirty="0"/>
           </a:p>
@@ -16559,7 +16992,7 @@
                 <a:ea typeface="Times New Roman" pitchFamily="34" charset="-122"/>
                 <a:cs typeface="Times New Roman" pitchFamily="34" charset="-120"/>
               </a:rPr>
-              <a:t>Homework</a:t>
+              <a:t>Expected Answer</a:t>
             </a:r>
             <a:endParaRPr lang="en-US" sz="3600" dirty="0"/>
           </a:p>
@@ -16601,7 +17034,7 @@
                 <a:ea typeface="Times New Roman" pitchFamily="34" charset="-122"/>
                 <a:cs typeface="Times New Roman" pitchFamily="34" charset="-120"/>
               </a:rPr>
-              <a:t>Observe food waste at home for three days and suggest how to reduce it.</a:t>
+              <a:t>Better storage and buying only what we need.</a:t>
             </a:r>
             <a:endParaRPr lang="en-US" sz="4000" dirty="0"/>
           </a:p>
@@ -16713,7 +17146,7 @@
                 <a:ea typeface="Calibri" pitchFamily="34" charset="-122"/>
                 <a:cs typeface="Calibri" pitchFamily="34" charset="-120"/>
               </a:rPr>
-              <a:t>NEXT LESSON</a:t>
+              <a:t>REMEDIATION</a:t>
             </a:r>
             <a:endParaRPr lang="en-US" sz="1400" dirty="0"/>
           </a:p>
@@ -16736,7 +17169,7 @@
         <p:spPr>
           <a:xfrm>
             <a:off x="0" y="658368"/>
-            <a:ext cx="5120640" cy="5833872"/>
+            <a:ext cx="2468880" cy="5833872"/>
           </a:xfrm>
           <a:prstGeom prst="rect">
             <a:avLst/>
@@ -16751,8 +17184,8 @@
         </p:nvSpPr>
         <p:spPr>
           <a:xfrm>
-            <a:off x="5349240" y="1005840"/>
-            <a:ext cx="6522415" cy="731520"/>
+            <a:off x="2697480" y="1005840"/>
+            <a:ext cx="9174175" cy="731520"/>
           </a:xfrm>
           <a:prstGeom prst="rect">
             <a:avLst/>
@@ -16778,7 +17211,7 @@
                 <a:ea typeface="Times New Roman" pitchFamily="34" charset="-122"/>
                 <a:cs typeface="Times New Roman" pitchFamily="34" charset="-120"/>
               </a:rPr>
-              <a:t>Next Lesson</a:t>
+              <a:t>Remediation</a:t>
             </a:r>
             <a:endParaRPr lang="en-US" sz="3600" dirty="0"/>
           </a:p>
@@ -16792,8 +17225,8 @@
         </p:nvSpPr>
         <p:spPr>
           <a:xfrm>
-            <a:off x="5349240" y="1783080"/>
-            <a:ext cx="6522415" cy="4663440"/>
+            <a:off x="2697480" y="1783080"/>
+            <a:ext cx="9174175" cy="4663440"/>
           </a:xfrm>
           <a:prstGeom prst="rect">
             <a:avLst/>
@@ -16802,10 +17235,10 @@
           <a:ln/>
         </p:spPr>
         <p:txBody>
-          <a:bodyPr wrap="square" lIns="0" tIns="0" rIns="0" bIns="0" rtlCol="0" anchor="ctr"/>
-          <a:lstStyle/>
-          <a:p>
-            <a:pPr algn="ctr" indent="0" marL="0">
+          <a:bodyPr wrap="square" lIns="0" tIns="0" rIns="0" bIns="0" rtlCol="0" anchor="t"/>
+          <a:lstStyle/>
+          <a:p>
+            <a:pPr algn="l" indent="0" marL="0">
               <a:spcAft>
                 <a:spcPts val="800"/>
               </a:spcAft>
@@ -16820,27 +17253,73 @@
                 <a:ea typeface="Times New Roman" pitchFamily="34" charset="-122"/>
                 <a:cs typeface="Times New Roman" pitchFamily="34" charset="-120"/>
               </a:rPr>
-              <a:t>Our next lesson will be on:</a:t>
+              <a:t>Fill in the blanks:</a:t>
             </a:r>
             <a:endParaRPr lang="en-US" sz="4000" dirty="0"/>
           </a:p>
           <a:p>
-            <a:pPr algn="ctr" indent="0" marL="0">
+            <a:pPr algn="l" marL="342900" indent="-342900">
               <a:spcAft>
                 <a:spcPts val="800"/>
               </a:spcAft>
-              <a:buNone/>
+              <a:buSzPct val="100000"/>
+              <a:buFont typeface="+mj-lt"/>
+              <a:buAutoNum type="arabicPeriod" startAt="1"/>
             </a:pPr>
             <a:r>
-              <a:rPr lang="en-US" sz="4000" b="1" dirty="0">
-                <a:solidFill>
-                  <a:srgbClr val="990011"/>
+              <a:rPr lang="en-US" sz="4000" dirty="0">
+                <a:solidFill>
+                  <a:srgbClr val="111111"/>
                 </a:solidFill>
                 <a:latin typeface="Times New Roman" pitchFamily="34" charset="0"/>
                 <a:ea typeface="Times New Roman" pitchFamily="34" charset="-122"/>
                 <a:cs typeface="Times New Roman" pitchFamily="34" charset="-120"/>
               </a:rPr>
-              <a:t>Lesson 38: Problems of Tropical Agriculture with Reference to Cameroon</a:t>
+              <a:t>Food rotting in storage is food ______.</a:t>
+            </a:r>
+            <a:endParaRPr lang="en-US" sz="4000" dirty="0"/>
+          </a:p>
+          <a:p>
+            <a:pPr algn="l" marL="342900" indent="-342900">
+              <a:spcAft>
+                <a:spcPts val="800"/>
+              </a:spcAft>
+              <a:buSzPct val="100000"/>
+              <a:buFont typeface="+mj-lt"/>
+              <a:buAutoNum type="arabicPeriod" startAt="1"/>
+            </a:pPr>
+            <a:r>
+              <a:rPr lang="en-US" sz="4000" dirty="0">
+                <a:solidFill>
+                  <a:srgbClr val="111111"/>
+                </a:solidFill>
+                <a:latin typeface="Times New Roman" pitchFamily="34" charset="0"/>
+                <a:ea typeface="Times New Roman" pitchFamily="34" charset="-122"/>
+                <a:cs typeface="Times New Roman" pitchFamily="34" charset="-120"/>
+              </a:rPr>
+              <a:t>Food thrown away at home is food ______.</a:t>
+            </a:r>
+            <a:endParaRPr lang="en-US" sz="4000" dirty="0"/>
+          </a:p>
+          <a:p>
+            <a:pPr algn="l" marL="342900" indent="-342900">
+              <a:spcAft>
+                <a:spcPts val="800"/>
+              </a:spcAft>
+              <a:buSzPct val="100000"/>
+              <a:buFont typeface="+mj-lt"/>
+              <a:buAutoNum type="arabicPeriod" startAt="1"/>
+            </a:pPr>
+            <a:r>
+              <a:rPr lang="en-US" sz="4000" dirty="0">
+                <a:solidFill>
+                  <a:srgbClr val="111111"/>
+                </a:solidFill>
+                <a:latin typeface="Times New Roman" pitchFamily="34" charset="0"/>
+                <a:ea typeface="Times New Roman" pitchFamily="34" charset="-122"/>
+                <a:cs typeface="Times New Roman" pitchFamily="34" charset="-120"/>
+              </a:rPr>
+              <a:t>Drying tomatoes is a form of ______.</a:t>
             </a:r>
             <a:endParaRPr lang="en-US" sz="4000" dirty="0"/>
           </a:p>
@@ -16952,6 +17431,683 @@
                 <a:ea typeface="Calibri" pitchFamily="34" charset="-122"/>
                 <a:cs typeface="Calibri" pitchFamily="34" charset="-120"/>
               </a:rPr>
+              <a:t>HOMEWORK</a:t>
+            </a:r>
+            <a:endParaRPr lang="en-US" sz="1400" dirty="0"/>
+          </a:p>
+        </p:txBody>
+      </p:sp>
+      <p:pic>
+        <p:nvPicPr>
+          <p:cNvPr id="3" name="Image 0" descr="/home/claude/f4/img/minesec_sheet.png">    </p:cNvPr>
+          <p:cNvPicPr>
+            <a:picLocks noChangeAspect="1"/>
+          </p:cNvPicPr>
+          <p:nvPr/>
+        </p:nvPicPr>
+        <p:blipFill>
+          <a:blip r:embed="rId1"/>
+          <a:stretch>
+            <a:fillRect/>
+          </a:stretch>
+        </p:blipFill>
+        <p:spPr>
+          <a:xfrm>
+            <a:off x="0" y="658368"/>
+            <a:ext cx="5120640" cy="5833872"/>
+          </a:xfrm>
+          <a:prstGeom prst="rect">
+            <a:avLst/>
+          </a:prstGeom>
+        </p:spPr>
+      </p:pic>
+      <p:sp>
+        <p:nvSpPr>
+          <p:cNvPr id="4" name="Text 1"/>
+          <p:cNvSpPr/>
+          <p:nvPr/>
+        </p:nvSpPr>
+        <p:spPr>
+          <a:xfrm>
+            <a:off x="5349240" y="1005840"/>
+            <a:ext cx="6522415" cy="731520"/>
+          </a:xfrm>
+          <a:prstGeom prst="rect">
+            <a:avLst/>
+          </a:prstGeom>
+          <a:noFill/>
+          <a:ln/>
+        </p:spPr>
+        <p:txBody>
+          <a:bodyPr wrap="square" lIns="0" tIns="0" rIns="0" bIns="0" rtlCol="0" anchor="ctr">
+            <a:normAutofit/>
+          </a:bodyPr>
+          <a:lstStyle/>
+          <a:p>
+            <a:pPr algn="ctr" indent="0" marL="0">
+              <a:buNone/>
+            </a:pPr>
+            <a:r>
+              <a:rPr lang="en-US" sz="3600" b="1" dirty="0">
+                <a:solidFill>
+                  <a:srgbClr val="990011"/>
+                </a:solidFill>
+                <a:latin typeface="Times New Roman" pitchFamily="34" charset="0"/>
+                <a:ea typeface="Times New Roman" pitchFamily="34" charset="-122"/>
+                <a:cs typeface="Times New Roman" pitchFamily="34" charset="-120"/>
+              </a:rPr>
+              <a:t>Homework</a:t>
+            </a:r>
+            <a:endParaRPr lang="en-US" sz="3600" dirty="0"/>
+          </a:p>
+        </p:txBody>
+      </p:sp>
+      <p:sp>
+        <p:nvSpPr>
+          <p:cNvPr id="5" name="Text 2"/>
+          <p:cNvSpPr/>
+          <p:nvPr/>
+        </p:nvSpPr>
+        <p:spPr>
+          <a:xfrm>
+            <a:off x="5349240" y="1783080"/>
+            <a:ext cx="6522415" cy="4663440"/>
+          </a:xfrm>
+          <a:prstGeom prst="rect">
+            <a:avLst/>
+          </a:prstGeom>
+          <a:noFill/>
+          <a:ln/>
+        </p:spPr>
+        <p:txBody>
+          <a:bodyPr wrap="square" lIns="0" tIns="0" rIns="0" bIns="0" rtlCol="0" anchor="t"/>
+          <a:lstStyle/>
+          <a:p>
+            <a:pPr algn="l" indent="0" marL="0">
+              <a:spcAft>
+                <a:spcPts val="800"/>
+              </a:spcAft>
+              <a:buNone/>
+            </a:pPr>
+            <a:r>
+              <a:rPr lang="en-US" sz="4000" dirty="0">
+                <a:solidFill>
+                  <a:srgbClr val="111111"/>
+                </a:solidFill>
+                <a:latin typeface="Times New Roman" pitchFamily="34" charset="0"/>
+                <a:ea typeface="Times New Roman" pitchFamily="34" charset="-122"/>
+                <a:cs typeface="Times New Roman" pitchFamily="34" charset="-120"/>
+              </a:rPr>
+              <a:t>Observe food waste at home for three days and suggest how to reduce it.</a:t>
+            </a:r>
+            <a:endParaRPr lang="en-US" sz="4000" dirty="0"/>
+          </a:p>
+        </p:txBody>
+      </p:sp>
+      <p:sp>
+        <p:nvSpPr>
+          <p:cNvPr id="25" name="Slide Number Placeholder 0"/>
+          <p:cNvSpPr>
+            <a:spLocks noGrp="1"/>
+          </p:cNvSpPr>
+          <p:nvPr>
+            <p:ph type="sldNum" sz="quarter" idx="4294967295"/>
+          </p:nvPr>
+        </p:nvSpPr>
+        <p:spPr>
+          <a:xfrm>
+            <a:off x="27432" y="91440"/>
+            <a:ext cx="585216" cy="475488"/>
+          </a:xfrm>
+          <a:prstGeom prst="rect">
+            <a:avLst/>
+          </a:prstGeom>
+          <a:extLst>
+            <a:ext uri="{C572A759-6A51-4108-AA02-DFA0A04FC94B}">
+              <ma14:wrappingTextBoxFlag xmlns:ma14="http://schemas.microsoft.com/office/mac/drawingml/2011/main" val="0"/>
+            </a:ext>
+          </a:extLst>
+        </p:spPr>
+        <p:txBody>
+          <a:bodyPr/>
+          <a:lstStyle>
+            <a:lvl1pPr>
+              <a:defRPr sz="2000">
+                <a:solidFill>
+                  <a:srgbClr val="FFFFFF"/>
+                </a:solidFill>
+                <a:latin typeface="Calibri"/>
+                <a:ea typeface="Calibri"/>
+                <a:cs typeface="Calibri"/>
+              </a:defRPr>
+            </a:lvl1pPr>
+          </a:lstStyle>
+          <a:p>
+            <a:pPr algn="ctr"/>
+            <a:fld id="{F7021451-1387-4CA6-816F-3879F97B5CBC}" type="slidenum">
+              <a:rPr b="1" lang="en-US"/>
+              <a:t>48</a:t>
+            </a:fld>
+            <a:endParaRPr lang="en-US"/>
+          </a:p>
+        </p:txBody>
+      </p:sp>
+    </p:spTree>
+  </p:cSld>
+  <p:clrMapOvr>
+    <a:masterClrMapping/>
+  </p:clrMapOvr>
+</p:sld>
+</file>
+
+<file path=ppt/slides/slide49.xml><?xml version="1.0" encoding="utf-8"?>
+<p:sld xmlns:a="http://schemas.openxmlformats.org/drawingml/2006/main" xmlns:r="http://schemas.openxmlformats.org/officeDocument/2006/relationships" xmlns:p="http://schemas.openxmlformats.org/presentationml/2006/main">
+  <p:cSld name="Slide 49">
+    <p:spTree>
+      <p:nvGrpSpPr>
+        <p:cNvPr id="1" name=""/>
+        <p:cNvGrpSpPr/>
+        <p:nvPr/>
+      </p:nvGrpSpPr>
+      <p:grpSpPr>
+        <a:xfrm>
+          <a:off x="0" y="0"/>
+          <a:ext cx="0" cy="0"/>
+          <a:chOff x="0" y="0"/>
+          <a:chExt cx="0" cy="0"/>
+        </a:xfrm>
+      </p:grpSpPr>
+      <p:sp>
+        <p:nvSpPr>
+          <p:cNvPr id="2" name="Text 0"/>
+          <p:cNvSpPr/>
+          <p:nvPr/>
+        </p:nvSpPr>
+        <p:spPr>
+          <a:xfrm>
+            <a:off x="457200" y="713232"/>
+            <a:ext cx="11368735" cy="274320"/>
+          </a:xfrm>
+          <a:prstGeom prst="rect">
+            <a:avLst/>
+          </a:prstGeom>
+          <a:noFill/>
+          <a:ln/>
+        </p:spPr>
+        <p:txBody>
+          <a:bodyPr wrap="square" lIns="0" tIns="0" rIns="0" bIns="0" rtlCol="0" anchor="ctr"/>
+          <a:lstStyle/>
+          <a:p>
+            <a:pPr algn="r" indent="0" marL="0">
+              <a:buNone/>
+            </a:pPr>
+            <a:r>
+              <a:rPr lang="en-US" sz="1400" b="1" dirty="0">
+                <a:solidFill>
+                  <a:srgbClr val="1C3F6E"/>
+                </a:solidFill>
+                <a:latin typeface="Calibri" pitchFamily="34" charset="0"/>
+                <a:ea typeface="Calibri" pitchFamily="34" charset="-122"/>
+                <a:cs typeface="Calibri" pitchFamily="34" charset="-120"/>
+              </a:rPr>
+              <a:t>NEXT LESSON</a:t>
+            </a:r>
+            <a:endParaRPr lang="en-US" sz="1400" dirty="0"/>
+          </a:p>
+        </p:txBody>
+      </p:sp>
+      <p:pic>
+        <p:nvPicPr>
+          <p:cNvPr id="3" name="Image 0" descr="/home/claude/f4/img/minesec_sheet.png">    </p:cNvPr>
+          <p:cNvPicPr>
+            <a:picLocks noChangeAspect="1"/>
+          </p:cNvPicPr>
+          <p:nvPr/>
+        </p:nvPicPr>
+        <p:blipFill>
+          <a:blip r:embed="rId1"/>
+          <a:stretch>
+            <a:fillRect/>
+          </a:stretch>
+        </p:blipFill>
+        <p:spPr>
+          <a:xfrm>
+            <a:off x="0" y="658368"/>
+            <a:ext cx="5120640" cy="5833872"/>
+          </a:xfrm>
+          <a:prstGeom prst="rect">
+            <a:avLst/>
+          </a:prstGeom>
+        </p:spPr>
+      </p:pic>
+      <p:sp>
+        <p:nvSpPr>
+          <p:cNvPr id="4" name="Text 1"/>
+          <p:cNvSpPr/>
+          <p:nvPr/>
+        </p:nvSpPr>
+        <p:spPr>
+          <a:xfrm>
+            <a:off x="5349240" y="1005840"/>
+            <a:ext cx="6522415" cy="731520"/>
+          </a:xfrm>
+          <a:prstGeom prst="rect">
+            <a:avLst/>
+          </a:prstGeom>
+          <a:noFill/>
+          <a:ln/>
+        </p:spPr>
+        <p:txBody>
+          <a:bodyPr wrap="square" lIns="0" tIns="0" rIns="0" bIns="0" rtlCol="0" anchor="ctr">
+            <a:normAutofit/>
+          </a:bodyPr>
+          <a:lstStyle/>
+          <a:p>
+            <a:pPr algn="ctr" indent="0" marL="0">
+              <a:buNone/>
+            </a:pPr>
+            <a:r>
+              <a:rPr lang="en-US" sz="3600" b="1" dirty="0">
+                <a:solidFill>
+                  <a:srgbClr val="990011"/>
+                </a:solidFill>
+                <a:latin typeface="Times New Roman" pitchFamily="34" charset="0"/>
+                <a:ea typeface="Times New Roman" pitchFamily="34" charset="-122"/>
+                <a:cs typeface="Times New Roman" pitchFamily="34" charset="-120"/>
+              </a:rPr>
+              <a:t>Next Lesson</a:t>
+            </a:r>
+            <a:endParaRPr lang="en-US" sz="3600" dirty="0"/>
+          </a:p>
+        </p:txBody>
+      </p:sp>
+      <p:sp>
+        <p:nvSpPr>
+          <p:cNvPr id="5" name="Text 2"/>
+          <p:cNvSpPr/>
+          <p:nvPr/>
+        </p:nvSpPr>
+        <p:spPr>
+          <a:xfrm>
+            <a:off x="5349240" y="1783080"/>
+            <a:ext cx="6522415" cy="4663440"/>
+          </a:xfrm>
+          <a:prstGeom prst="rect">
+            <a:avLst/>
+          </a:prstGeom>
+          <a:noFill/>
+          <a:ln/>
+        </p:spPr>
+        <p:txBody>
+          <a:bodyPr wrap="square" lIns="0" tIns="0" rIns="0" bIns="0" rtlCol="0" anchor="ctr"/>
+          <a:lstStyle/>
+          <a:p>
+            <a:pPr algn="ctr" indent="0" marL="0">
+              <a:spcAft>
+                <a:spcPts val="800"/>
+              </a:spcAft>
+              <a:buNone/>
+            </a:pPr>
+            <a:r>
+              <a:rPr lang="en-US" sz="4000" b="1" dirty="0">
+                <a:solidFill>
+                  <a:srgbClr val="111111"/>
+                </a:solidFill>
+                <a:latin typeface="Times New Roman" pitchFamily="34" charset="0"/>
+                <a:ea typeface="Times New Roman" pitchFamily="34" charset="-122"/>
+                <a:cs typeface="Times New Roman" pitchFamily="34" charset="-120"/>
+              </a:rPr>
+              <a:t>Our next lesson will be on:</a:t>
+            </a:r>
+            <a:endParaRPr lang="en-US" sz="4000" dirty="0"/>
+          </a:p>
+          <a:p>
+            <a:pPr algn="ctr" indent="0" marL="0">
+              <a:spcAft>
+                <a:spcPts val="800"/>
+              </a:spcAft>
+              <a:buNone/>
+            </a:pPr>
+            <a:r>
+              <a:rPr lang="en-US" sz="4000" b="1" dirty="0">
+                <a:solidFill>
+                  <a:srgbClr val="990011"/>
+                </a:solidFill>
+                <a:latin typeface="Times New Roman" pitchFamily="34" charset="0"/>
+                <a:ea typeface="Times New Roman" pitchFamily="34" charset="-122"/>
+                <a:cs typeface="Times New Roman" pitchFamily="34" charset="-120"/>
+              </a:rPr>
+              <a:t>Lesson 38: Problems of Tropical Agriculture with Reference to Cameroon</a:t>
+            </a:r>
+            <a:endParaRPr lang="en-US" sz="4000" dirty="0"/>
+          </a:p>
+        </p:txBody>
+      </p:sp>
+      <p:sp>
+        <p:nvSpPr>
+          <p:cNvPr id="25" name="Slide Number Placeholder 0"/>
+          <p:cNvSpPr>
+            <a:spLocks noGrp="1"/>
+          </p:cNvSpPr>
+          <p:nvPr>
+            <p:ph type="sldNum" sz="quarter" idx="4294967295"/>
+          </p:nvPr>
+        </p:nvSpPr>
+        <p:spPr>
+          <a:xfrm>
+            <a:off x="27432" y="91440"/>
+            <a:ext cx="585216" cy="475488"/>
+          </a:xfrm>
+          <a:prstGeom prst="rect">
+            <a:avLst/>
+          </a:prstGeom>
+          <a:extLst>
+            <a:ext uri="{C572A759-6A51-4108-AA02-DFA0A04FC94B}">
+              <ma14:wrappingTextBoxFlag xmlns:ma14="http://schemas.microsoft.com/office/mac/drawingml/2011/main" val="0"/>
+            </a:ext>
+          </a:extLst>
+        </p:spPr>
+        <p:txBody>
+          <a:bodyPr/>
+          <a:lstStyle>
+            <a:lvl1pPr>
+              <a:defRPr sz="2000">
+                <a:solidFill>
+                  <a:srgbClr val="FFFFFF"/>
+                </a:solidFill>
+                <a:latin typeface="Calibri"/>
+                <a:ea typeface="Calibri"/>
+                <a:cs typeface="Calibri"/>
+              </a:defRPr>
+            </a:lvl1pPr>
+          </a:lstStyle>
+          <a:p>
+            <a:pPr algn="ctr"/>
+            <a:fld id="{F7021451-1387-4CA6-816F-3879F97B5CBC}" type="slidenum">
+              <a:rPr b="1" lang="en-US"/>
+              <a:t>49</a:t>
+            </a:fld>
+            <a:endParaRPr lang="en-US"/>
+          </a:p>
+        </p:txBody>
+      </p:sp>
+    </p:spTree>
+  </p:cSld>
+  <p:clrMapOvr>
+    <a:masterClrMapping/>
+  </p:clrMapOvr>
+</p:sld>
+</file>
+
+<file path=ppt/slides/slide5.xml><?xml version="1.0" encoding="utf-8"?>
+<p:sld xmlns:a="http://schemas.openxmlformats.org/drawingml/2006/main" xmlns:r="http://schemas.openxmlformats.org/officeDocument/2006/relationships" xmlns:p="http://schemas.openxmlformats.org/presentationml/2006/main">
+  <p:cSld name="Slide 5">
+    <p:spTree>
+      <p:nvGrpSpPr>
+        <p:cNvPr id="1" name=""/>
+        <p:cNvGrpSpPr/>
+        <p:nvPr/>
+      </p:nvGrpSpPr>
+      <p:grpSpPr>
+        <a:xfrm>
+          <a:off x="0" y="0"/>
+          <a:ext cx="0" cy="0"/>
+          <a:chOff x="0" y="0"/>
+          <a:chExt cx="0" cy="0"/>
+        </a:xfrm>
+      </p:grpSpPr>
+      <p:sp>
+        <p:nvSpPr>
+          <p:cNvPr id="2" name="Text 0"/>
+          <p:cNvSpPr/>
+          <p:nvPr/>
+        </p:nvSpPr>
+        <p:spPr>
+          <a:xfrm>
+            <a:off x="457200" y="713232"/>
+            <a:ext cx="11368735" cy="274320"/>
+          </a:xfrm>
+          <a:prstGeom prst="rect">
+            <a:avLst/>
+          </a:prstGeom>
+          <a:noFill/>
+          <a:ln/>
+        </p:spPr>
+        <p:txBody>
+          <a:bodyPr wrap="square" lIns="0" tIns="0" rIns="0" bIns="0" rtlCol="0" anchor="ctr"/>
+          <a:lstStyle/>
+          <a:p>
+            <a:pPr algn="r" indent="0" marL="0">
+              <a:buNone/>
+            </a:pPr>
+            <a:r>
+              <a:rPr lang="en-US" sz="1400" b="1" dirty="0">
+                <a:solidFill>
+                  <a:srgbClr val="1C3F6E"/>
+                </a:solidFill>
+                <a:latin typeface="Calibri" pitchFamily="34" charset="0"/>
+                <a:ea typeface="Calibri" pitchFamily="34" charset="-122"/>
+                <a:cs typeface="Calibri" pitchFamily="34" charset="-120"/>
+              </a:rPr>
+              <a:t>HOMEWORK CORRECTION</a:t>
+            </a:r>
+            <a:endParaRPr lang="en-US" sz="1400" dirty="0"/>
+          </a:p>
+        </p:txBody>
+      </p:sp>
+      <p:pic>
+        <p:nvPicPr>
+          <p:cNvPr id="3" name="Image 0" descr="/home/claude/f4/img/minesec_sheet.png">    </p:cNvPr>
+          <p:cNvPicPr>
+            <a:picLocks noChangeAspect="1"/>
+          </p:cNvPicPr>
+          <p:nvPr/>
+        </p:nvPicPr>
+        <p:blipFill>
+          <a:blip r:embed="rId1"/>
+          <a:stretch>
+            <a:fillRect/>
+          </a:stretch>
+        </p:blipFill>
+        <p:spPr>
+          <a:xfrm>
+            <a:off x="0" y="658368"/>
+            <a:ext cx="5120640" cy="5833872"/>
+          </a:xfrm>
+          <a:prstGeom prst="rect">
+            <a:avLst/>
+          </a:prstGeom>
+        </p:spPr>
+      </p:pic>
+      <p:sp>
+        <p:nvSpPr>
+          <p:cNvPr id="4" name="Text 1"/>
+          <p:cNvSpPr/>
+          <p:nvPr/>
+        </p:nvSpPr>
+        <p:spPr>
+          <a:xfrm>
+            <a:off x="5349240" y="1005840"/>
+            <a:ext cx="6522415" cy="731520"/>
+          </a:xfrm>
+          <a:prstGeom prst="rect">
+            <a:avLst/>
+          </a:prstGeom>
+          <a:noFill/>
+          <a:ln/>
+        </p:spPr>
+        <p:txBody>
+          <a:bodyPr wrap="square" lIns="0" tIns="0" rIns="0" bIns="0" rtlCol="0" anchor="ctr">
+            <a:normAutofit/>
+          </a:bodyPr>
+          <a:lstStyle/>
+          <a:p>
+            <a:pPr algn="ctr" indent="0" marL="0">
+              <a:buNone/>
+            </a:pPr>
+            <a:r>
+              <a:rPr lang="en-US" sz="3600" b="1" dirty="0">
+                <a:solidFill>
+                  <a:srgbClr val="990011"/>
+                </a:solidFill>
+                <a:latin typeface="Times New Roman" pitchFamily="34" charset="0"/>
+                <a:ea typeface="Times New Roman" pitchFamily="34" charset="-122"/>
+                <a:cs typeface="Times New Roman" pitchFamily="34" charset="-120"/>
+              </a:rPr>
+              <a:t>Correction: Possible Answer</a:t>
+            </a:r>
+            <a:endParaRPr lang="en-US" sz="3600" dirty="0"/>
+          </a:p>
+        </p:txBody>
+      </p:sp>
+      <p:sp>
+        <p:nvSpPr>
+          <p:cNvPr id="5" name="Text 2"/>
+          <p:cNvSpPr/>
+          <p:nvPr/>
+        </p:nvSpPr>
+        <p:spPr>
+          <a:xfrm>
+            <a:off x="5349240" y="1783080"/>
+            <a:ext cx="6522415" cy="4663440"/>
+          </a:xfrm>
+          <a:prstGeom prst="rect">
+            <a:avLst/>
+          </a:prstGeom>
+          <a:noFill/>
+          <a:ln/>
+        </p:spPr>
+        <p:txBody>
+          <a:bodyPr wrap="square" lIns="0" tIns="0" rIns="0" bIns="0" rtlCol="0" anchor="t"/>
+          <a:lstStyle/>
+          <a:p>
+            <a:pPr algn="l" indent="0" marL="0">
+              <a:spcAft>
+                <a:spcPts val="800"/>
+              </a:spcAft>
+              <a:buNone/>
+            </a:pPr>
+            <a:r>
+              <a:rPr lang="en-US" sz="4000" dirty="0">
+                <a:solidFill>
+                  <a:srgbClr val="111111"/>
+                </a:solidFill>
+                <a:latin typeface="Times New Roman" pitchFamily="34" charset="0"/>
+                <a:ea typeface="Times New Roman" pitchFamily="34" charset="-122"/>
+                <a:cs typeface="Times New Roman" pitchFamily="34" charset="-120"/>
+              </a:rPr>
+              <a:t>CICAM (cotton → cloth), SABC (maize and sorghum → drinks), SOSUCAM (sugar cane → sugar) (also SOCAPALM: palm oil).</a:t>
+            </a:r>
+            <a:endParaRPr lang="en-US" sz="4000" dirty="0"/>
+          </a:p>
+        </p:txBody>
+      </p:sp>
+      <p:sp>
+        <p:nvSpPr>
+          <p:cNvPr id="25" name="Slide Number Placeholder 0"/>
+          <p:cNvSpPr>
+            <a:spLocks noGrp="1"/>
+          </p:cNvSpPr>
+          <p:nvPr>
+            <p:ph type="sldNum" sz="quarter" idx="4294967295"/>
+          </p:nvPr>
+        </p:nvSpPr>
+        <p:spPr>
+          <a:xfrm>
+            <a:off x="27432" y="91440"/>
+            <a:ext cx="585216" cy="475488"/>
+          </a:xfrm>
+          <a:prstGeom prst="rect">
+            <a:avLst/>
+          </a:prstGeom>
+          <a:extLst>
+            <a:ext uri="{C572A759-6A51-4108-AA02-DFA0A04FC94B}">
+              <ma14:wrappingTextBoxFlag xmlns:ma14="http://schemas.microsoft.com/office/mac/drawingml/2011/main" val="0"/>
+            </a:ext>
+          </a:extLst>
+        </p:spPr>
+        <p:txBody>
+          <a:bodyPr/>
+          <a:lstStyle>
+            <a:lvl1pPr>
+              <a:defRPr sz="2000">
+                <a:solidFill>
+                  <a:srgbClr val="FFFFFF"/>
+                </a:solidFill>
+                <a:latin typeface="Calibri"/>
+                <a:ea typeface="Calibri"/>
+                <a:cs typeface="Calibri"/>
+              </a:defRPr>
+            </a:lvl1pPr>
+          </a:lstStyle>
+          <a:p>
+            <a:pPr algn="ctr"/>
+            <a:fld id="{F7021451-1387-4CA6-816F-3879F97B5CBC}" type="slidenum">
+              <a:rPr b="1" lang="en-US"/>
+              <a:t>5</a:t>
+            </a:fld>
+            <a:endParaRPr lang="en-US"/>
+          </a:p>
+        </p:txBody>
+      </p:sp>
+    </p:spTree>
+  </p:cSld>
+  <p:clrMapOvr>
+    <a:masterClrMapping/>
+  </p:clrMapOvr>
+</p:sld>
+</file>
+
+<file path=ppt/slides/slide50.xml><?xml version="1.0" encoding="utf-8"?>
+<p:sld xmlns:a="http://schemas.openxmlformats.org/drawingml/2006/main" xmlns:r="http://schemas.openxmlformats.org/officeDocument/2006/relationships" xmlns:p="http://schemas.openxmlformats.org/presentationml/2006/main">
+  <p:cSld name="Slide 50">
+    <p:spTree>
+      <p:nvGrpSpPr>
+        <p:cNvPr id="1" name=""/>
+        <p:cNvGrpSpPr/>
+        <p:nvPr/>
+      </p:nvGrpSpPr>
+      <p:grpSpPr>
+        <a:xfrm>
+          <a:off x="0" y="0"/>
+          <a:ext cx="0" cy="0"/>
+          <a:chOff x="0" y="0"/>
+          <a:chExt cx="0" cy="0"/>
+        </a:xfrm>
+      </p:grpSpPr>
+      <p:sp>
+        <p:nvSpPr>
+          <p:cNvPr id="2" name="Text 0"/>
+          <p:cNvSpPr/>
+          <p:nvPr/>
+        </p:nvSpPr>
+        <p:spPr>
+          <a:xfrm>
+            <a:off x="457200" y="713232"/>
+            <a:ext cx="11368735" cy="274320"/>
+          </a:xfrm>
+          <a:prstGeom prst="rect">
+            <a:avLst/>
+          </a:prstGeom>
+          <a:noFill/>
+          <a:ln/>
+        </p:spPr>
+        <p:txBody>
+          <a:bodyPr wrap="square" lIns="0" tIns="0" rIns="0" bIns="0" rtlCol="0" anchor="ctr"/>
+          <a:lstStyle/>
+          <a:p>
+            <a:pPr algn="r" indent="0" marL="0">
+              <a:buNone/>
+            </a:pPr>
+            <a:r>
+              <a:rPr lang="en-US" sz="1400" b="1" dirty="0">
+                <a:solidFill>
+                  <a:srgbClr val="1C3F6E"/>
+                </a:solidFill>
+                <a:latin typeface="Calibri" pitchFamily="34" charset="0"/>
+                <a:ea typeface="Calibri" pitchFamily="34" charset="-122"/>
+                <a:cs typeface="Calibri" pitchFamily="34" charset="-120"/>
+              </a:rPr>
               <a:t>BILINGUAL GAME</a:t>
             </a:r>
             <a:endParaRPr lang="en-US" sz="1400" dirty="0"/>
@@ -16999,7 +18155,7 @@
       </p:sp>
       <p:graphicFrame>
         <p:nvGraphicFramePr>
-          <p:cNvPr id="49" name="Table 0"/>
+          <p:cNvPr id="51" name="Table 0"/>
           <p:cNvGraphicFramePr>
             <a:graphicFrameLocks noGrp="1"/>
           </p:cNvGraphicFramePr>
@@ -18035,7 +19191,7 @@
             <a:pPr algn="ctr"/>
             <a:fld id="{F7021451-1387-4CA6-816F-3879F97B5CBC}" type="slidenum">
               <a:rPr b="1" lang="en-US"/>
-              <a:t>48</a:t>
+              <a:t>50</a:t>
             </a:fld>
             <a:endParaRPr lang="en-US"/>
           </a:p>
@@ -18049,9 +19205,9 @@
 </p:sld>
 </file>
 
-<file path=ppt/slides/slide49.xml><?xml version="1.0" encoding="utf-8"?>
+<file path=ppt/slides/slide51.xml><?xml version="1.0" encoding="utf-8"?>
 <p:sld xmlns:a="http://schemas.openxmlformats.org/drawingml/2006/main" xmlns:r="http://schemas.openxmlformats.org/officeDocument/2006/relationships" xmlns:p="http://schemas.openxmlformats.org/presentationml/2006/main">
-  <p:cSld name="Slide 49">
+  <p:cSld name="Slide 51">
     <p:spTree>
       <p:nvGrpSpPr>
         <p:cNvPr id="1" name=""/>
@@ -18146,7 +19302,7 @@
       </p:sp>
       <p:graphicFrame>
         <p:nvGraphicFramePr>
-          <p:cNvPr id="50" name="Table 0"/>
+          <p:cNvPr id="52" name="Table 0"/>
           <p:cNvGraphicFramePr>
             <a:graphicFrameLocks noGrp="1"/>
           </p:cNvGraphicFramePr>
@@ -18768,7 +19924,7 @@
             <a:pPr algn="ctr"/>
             <a:fld id="{F7021451-1387-4CA6-816F-3879F97B5CBC}" type="slidenum">
               <a:rPr b="1" lang="en-US"/>
-              <a:t>49</a:t>
+              <a:t>51</a:t>
             </a:fld>
             <a:endParaRPr lang="en-US"/>
           </a:p>
@@ -18782,9 +19938,9 @@
 </p:sld>
 </file>
 
-<file path=ppt/slides/slide5.xml><?xml version="1.0" encoding="utf-8"?>
+<file path=ppt/slides/slide52.xml><?xml version="1.0" encoding="utf-8"?>
 <p:sld xmlns:a="http://schemas.openxmlformats.org/drawingml/2006/main" xmlns:r="http://schemas.openxmlformats.org/officeDocument/2006/relationships" xmlns:p="http://schemas.openxmlformats.org/presentationml/2006/main">
-  <p:cSld name="Slide 5">
+  <p:cSld name="Slide 52">
     <p:spTree>
       <p:nvGrpSpPr>
         <p:cNvPr id="1" name=""/>
@@ -18832,225 +19988,6 @@
                 <a:ea typeface="Calibri" pitchFamily="34" charset="-122"/>
                 <a:cs typeface="Calibri" pitchFamily="34" charset="-120"/>
               </a:rPr>
-              <a:t>HOMEWORK CORRECTION</a:t>
-            </a:r>
-            <a:endParaRPr lang="en-US" sz="1400" dirty="0"/>
-          </a:p>
-        </p:txBody>
-      </p:sp>
-      <p:pic>
-        <p:nvPicPr>
-          <p:cNvPr id="3" name="Image 0" descr="/home/claude/f4/img/minesec_sheet.png">    </p:cNvPr>
-          <p:cNvPicPr>
-            <a:picLocks noChangeAspect="1"/>
-          </p:cNvPicPr>
-          <p:nvPr/>
-        </p:nvPicPr>
-        <p:blipFill>
-          <a:blip r:embed="rId1"/>
-          <a:stretch>
-            <a:fillRect/>
-          </a:stretch>
-        </p:blipFill>
-        <p:spPr>
-          <a:xfrm>
-            <a:off x="0" y="658368"/>
-            <a:ext cx="5120640" cy="5833872"/>
-          </a:xfrm>
-          <a:prstGeom prst="rect">
-            <a:avLst/>
-          </a:prstGeom>
-        </p:spPr>
-      </p:pic>
-      <p:sp>
-        <p:nvSpPr>
-          <p:cNvPr id="4" name="Text 1"/>
-          <p:cNvSpPr/>
-          <p:nvPr/>
-        </p:nvSpPr>
-        <p:spPr>
-          <a:xfrm>
-            <a:off x="5349240" y="1005840"/>
-            <a:ext cx="6522415" cy="731520"/>
-          </a:xfrm>
-          <a:prstGeom prst="rect">
-            <a:avLst/>
-          </a:prstGeom>
-          <a:noFill/>
-          <a:ln/>
-        </p:spPr>
-        <p:txBody>
-          <a:bodyPr wrap="square" lIns="0" tIns="0" rIns="0" bIns="0" rtlCol="0" anchor="ctr">
-            <a:normAutofit/>
-          </a:bodyPr>
-          <a:lstStyle/>
-          <a:p>
-            <a:pPr algn="ctr" indent="0" marL="0">
-              <a:buNone/>
-            </a:pPr>
-            <a:r>
-              <a:rPr lang="en-US" sz="3600" b="1" dirty="0">
-                <a:solidFill>
-                  <a:srgbClr val="990011"/>
-                </a:solidFill>
-                <a:latin typeface="Times New Roman" pitchFamily="34" charset="0"/>
-                <a:ea typeface="Times New Roman" pitchFamily="34" charset="-122"/>
-                <a:cs typeface="Times New Roman" pitchFamily="34" charset="-120"/>
-              </a:rPr>
-              <a:t>Correction: Possible Answer</a:t>
-            </a:r>
-            <a:endParaRPr lang="en-US" sz="3600" dirty="0"/>
-          </a:p>
-        </p:txBody>
-      </p:sp>
-      <p:sp>
-        <p:nvSpPr>
-          <p:cNvPr id="5" name="Text 2"/>
-          <p:cNvSpPr/>
-          <p:nvPr/>
-        </p:nvSpPr>
-        <p:spPr>
-          <a:xfrm>
-            <a:off x="5349240" y="1783080"/>
-            <a:ext cx="6522415" cy="4663440"/>
-          </a:xfrm>
-          <a:prstGeom prst="rect">
-            <a:avLst/>
-          </a:prstGeom>
-          <a:noFill/>
-          <a:ln/>
-        </p:spPr>
-        <p:txBody>
-          <a:bodyPr wrap="square" lIns="0" tIns="0" rIns="0" bIns="0" rtlCol="0" anchor="t"/>
-          <a:lstStyle/>
-          <a:p>
-            <a:pPr algn="l" indent="0" marL="0">
-              <a:spcAft>
-                <a:spcPts val="800"/>
-              </a:spcAft>
-              <a:buNone/>
-            </a:pPr>
-            <a:r>
-              <a:rPr lang="en-US" sz="4000" dirty="0">
-                <a:solidFill>
-                  <a:srgbClr val="111111"/>
-                </a:solidFill>
-                <a:latin typeface="Times New Roman" pitchFamily="34" charset="0"/>
-                <a:ea typeface="Times New Roman" pitchFamily="34" charset="-122"/>
-                <a:cs typeface="Times New Roman" pitchFamily="34" charset="-120"/>
-              </a:rPr>
-              <a:t>CICAM (cotton → cloth), SABC (maize and sorghum → drinks), SOSUCAM (sugar cane → sugar) (also SOCAPALM: palm oil).</a:t>
-            </a:r>
-            <a:endParaRPr lang="en-US" sz="4000" dirty="0"/>
-          </a:p>
-        </p:txBody>
-      </p:sp>
-      <p:sp>
-        <p:nvSpPr>
-          <p:cNvPr id="25" name="Slide Number Placeholder 0"/>
-          <p:cNvSpPr>
-            <a:spLocks noGrp="1"/>
-          </p:cNvSpPr>
-          <p:nvPr>
-            <p:ph type="sldNum" sz="quarter" idx="4294967295"/>
-          </p:nvPr>
-        </p:nvSpPr>
-        <p:spPr>
-          <a:xfrm>
-            <a:off x="27432" y="91440"/>
-            <a:ext cx="585216" cy="475488"/>
-          </a:xfrm>
-          <a:prstGeom prst="rect">
-            <a:avLst/>
-          </a:prstGeom>
-          <a:extLst>
-            <a:ext uri="{C572A759-6A51-4108-AA02-DFA0A04FC94B}">
-              <ma14:wrappingTextBoxFlag xmlns:ma14="http://schemas.microsoft.com/office/mac/drawingml/2011/main" val="0"/>
-            </a:ext>
-          </a:extLst>
-        </p:spPr>
-        <p:txBody>
-          <a:bodyPr/>
-          <a:lstStyle>
-            <a:lvl1pPr>
-              <a:defRPr sz="2000">
-                <a:solidFill>
-                  <a:srgbClr val="FFFFFF"/>
-                </a:solidFill>
-                <a:latin typeface="Calibri"/>
-                <a:ea typeface="Calibri"/>
-                <a:cs typeface="Calibri"/>
-              </a:defRPr>
-            </a:lvl1pPr>
-          </a:lstStyle>
-          <a:p>
-            <a:pPr algn="ctr"/>
-            <a:fld id="{F7021451-1387-4CA6-816F-3879F97B5CBC}" type="slidenum">
-              <a:rPr b="1" lang="en-US"/>
-              <a:t>5</a:t>
-            </a:fld>
-            <a:endParaRPr lang="en-US"/>
-          </a:p>
-        </p:txBody>
-      </p:sp>
-    </p:spTree>
-  </p:cSld>
-  <p:clrMapOvr>
-    <a:masterClrMapping/>
-  </p:clrMapOvr>
-</p:sld>
-</file>
-
-<file path=ppt/slides/slide50.xml><?xml version="1.0" encoding="utf-8"?>
-<p:sld xmlns:a="http://schemas.openxmlformats.org/drawingml/2006/main" xmlns:r="http://schemas.openxmlformats.org/officeDocument/2006/relationships" xmlns:p="http://schemas.openxmlformats.org/presentationml/2006/main">
-  <p:cSld name="Slide 50">
-    <p:spTree>
-      <p:nvGrpSpPr>
-        <p:cNvPr id="1" name=""/>
-        <p:cNvGrpSpPr/>
-        <p:nvPr/>
-      </p:nvGrpSpPr>
-      <p:grpSpPr>
-        <a:xfrm>
-          <a:off x="0" y="0"/>
-          <a:ext cx="0" cy="0"/>
-          <a:chOff x="0" y="0"/>
-          <a:chExt cx="0" cy="0"/>
-        </a:xfrm>
-      </p:grpSpPr>
-      <p:sp>
-        <p:nvSpPr>
-          <p:cNvPr id="2" name="Text 0"/>
-          <p:cNvSpPr/>
-          <p:nvPr/>
-        </p:nvSpPr>
-        <p:spPr>
-          <a:xfrm>
-            <a:off x="457200" y="713232"/>
-            <a:ext cx="11368735" cy="274320"/>
-          </a:xfrm>
-          <a:prstGeom prst="rect">
-            <a:avLst/>
-          </a:prstGeom>
-          <a:noFill/>
-          <a:ln/>
-        </p:spPr>
-        <p:txBody>
-          <a:bodyPr wrap="square" lIns="0" tIns="0" rIns="0" bIns="0" rtlCol="0" anchor="ctr"/>
-          <a:lstStyle/>
-          <a:p>
-            <a:pPr algn="r" indent="0" marL="0">
-              <a:buNone/>
-            </a:pPr>
-            <a:r>
-              <a:rPr lang="en-US" sz="1400" b="1" dirty="0">
-                <a:solidFill>
-                  <a:srgbClr val="1C3F6E"/>
-                </a:solidFill>
-                <a:latin typeface="Calibri" pitchFamily="34" charset="0"/>
-                <a:ea typeface="Calibri" pitchFamily="34" charset="-122"/>
-                <a:cs typeface="Calibri" pitchFamily="34" charset="-120"/>
-              </a:rPr>
               <a:t>LOGBOOK</a:t>
             </a:r>
             <a:endParaRPr lang="en-US" sz="1400" dirty="0"/>
@@ -19098,7 +20035,7 @@
       </p:sp>
       <p:graphicFrame>
         <p:nvGraphicFramePr>
-          <p:cNvPr id="51" name="Table 0"/>
+          <p:cNvPr id="53" name="Table 0"/>
           <p:cNvGraphicFramePr>
             <a:graphicFrameLocks noGrp="1"/>
           </p:cNvGraphicFramePr>
@@ -19208,7 +20145,7 @@
                           <a:ea typeface="Calibri" pitchFamily="34" charset="-122"/>
                           <a:cs typeface="Calibri" pitchFamily="34" charset="-120"/>
                         </a:rPr>
-                        <a:t>DEFINITIONS; Causes; Consequences; Solutions.</a:t>
+                        <a:t>DEFINITIONS; Causes of Food Loss; Causes of Food Waste; Consequences; Solutions.</a:t>
                       </a:r>
                       <a:endParaRPr lang="en-US" sz="1600" dirty="0">
                         <a:latin typeface="Calibri" charset="0"/>
@@ -19858,7 +20795,7 @@
             <a:pPr algn="ctr"/>
             <a:fld id="{F7021451-1387-4CA6-816F-3879F97B5CBC}" type="slidenum">
               <a:rPr b="1" lang="en-US"/>
-              <a:t>50</a:t>
+              <a:t>52</a:t>
             </a:fld>
             <a:endParaRPr lang="en-US"/>
           </a:p>
@@ -19872,9 +20809,9 @@
 </p:sld>
 </file>
 
-<file path=ppt/slides/slide51.xml><?xml version="1.0" encoding="utf-8"?>
+<file path=ppt/slides/slide53.xml><?xml version="1.0" encoding="utf-8"?>
 <p:sld xmlns:a="http://schemas.openxmlformats.org/drawingml/2006/main" xmlns:r="http://schemas.openxmlformats.org/officeDocument/2006/relationships" xmlns:p="http://schemas.openxmlformats.org/presentationml/2006/main">
-  <p:cSld name="Slide 51">
+  <p:cSld name="Slide 53">
     <p:spTree>
       <p:nvGrpSpPr>
         <p:cNvPr id="1" name=""/>
@@ -20183,7 +21120,7 @@
             <a:pPr algn="ctr"/>
             <a:fld id="{F7021451-1387-4CA6-816F-3879F97B5CBC}" type="slidenum">
               <a:rPr b="1" lang="en-US"/>
-              <a:t>51</a:t>
+              <a:t>53</a:t>
             </a:fld>
             <a:endParaRPr lang="en-US"/>
           </a:p>
@@ -20197,9 +21134,9 @@
 </p:sld>
 </file>
 
-<file path=ppt/slides/slide52.xml><?xml version="1.0" encoding="utf-8"?>
+<file path=ppt/slides/slide54.xml><?xml version="1.0" encoding="utf-8"?>
 <p:sld xmlns:a="http://schemas.openxmlformats.org/drawingml/2006/main" xmlns:r="http://schemas.openxmlformats.org/officeDocument/2006/relationships" xmlns:p="http://schemas.openxmlformats.org/presentationml/2006/main">
-  <p:cSld name="Slide 52">
+  <p:cSld name="Slide 54">
     <p:spTree>
       <p:nvGrpSpPr>
         <p:cNvPr id="1" name=""/>
@@ -20508,7 +21445,7 @@
             <a:pPr algn="ctr"/>
             <a:fld id="{F7021451-1387-4CA6-816F-3879F97B5CBC}" type="slidenum">
               <a:rPr b="1" lang="en-US"/>
-              <a:t>52</a:t>
+              <a:t>54</a:t>
             </a:fld>
             <a:endParaRPr lang="en-US"/>
           </a:p>
